--- a/public/fun/pack/pptx/wedding/결혼식_11_소개중심_라일락골목.pptx
+++ b/public/fun/pack/pptx/wedding/결혼식_11_소개중심_라일락골목.pptx
@@ -3286,14 +3286,6 @@
 <file path=ppt/slides/slide1.xml><?xml version="1.0" encoding="utf-8"?>
 <p:sld xmlns:a="http://schemas.openxmlformats.org/drawingml/2006/main" xmlns:p="http://schemas.openxmlformats.org/presentationml/2006/main" xmlns:r="http://schemas.openxmlformats.org/officeDocument/2006/relationships">
   <p:cSld>
-    <p:bg>
-      <p:bgPr>
-        <a:solidFill>
-          <a:srgbClr val="FFFFFF"/>
-        </a:solidFill>
-        <a:effectLst/>
-      </p:bgPr>
-    </p:bg>
     <p:spTree>
       <p:nvGrpSpPr>
         <p:cNvPr id="1" name=""/>
@@ -3301,383 +3293,30 @@
         <p:nvPr/>
       </p:nvGrpSpPr>
       <p:grpSpPr/>
-      <p:sp>
-        <p:nvSpPr>
-          <p:cNvPr id="3" name="장식"/>
-          <p:cNvSpPr/>
+      <p:pic>
+        <p:nvPicPr>
+          <p:cNvPr id="3" name="표지 그림" descr="wedding-11.jpg"/>
+          <p:cNvPicPr>
+            <a:picLocks noChangeAspect="1"/>
+          </p:cNvPicPr>
           <p:nvPr/>
-        </p:nvSpPr>
-        <p:spPr>
-          <a:xfrm>
-            <a:off x="7071183" y="-1714500"/>
-            <a:ext cx="7886700" cy="7886700"/>
-          </a:xfrm>
-          <a:prstGeom prst="ellipse">
+        </p:nvPicPr>
+        <p:blipFill>
+          <a:blip r:embed="rId2"/>
+          <a:stretch>
+            <a:fillRect/>
+          </a:stretch>
+        </p:blipFill>
+        <p:spPr>
+          <a:xfrm>
+            <a:off x="0" y="0"/>
+            <a:ext cx="12191695" cy="6858000"/>
+          </a:xfrm>
+          <a:prstGeom prst="rect">
             <a:avLst/>
           </a:prstGeom>
-          <a:solidFill>
-            <a:srgbClr val="E3D3EE"/>
-          </a:solidFill>
-          <a:ln>
-            <a:noFill/>
-          </a:ln>
-        </p:spPr>
-        <p:txBody>
-          <a:bodyPr rtlCol="0" anchor="ctr"/>
-          <a:lstStyle/>
-          <a:p>
-            <a:pPr algn="ctr"/>
-          </a:p>
-        </p:txBody>
-      </p:sp>
-      <p:sp>
-        <p:nvSpPr>
-          <p:cNvPr id="4" name="장식"/>
-          <p:cNvSpPr/>
-          <p:nvPr/>
-        </p:nvSpPr>
-        <p:spPr>
-          <a:xfrm>
-            <a:off x="9509522" y="3977639"/>
-            <a:ext cx="3429000" cy="3429000"/>
-          </a:xfrm>
-          <a:prstGeom prst="ellipse">
-            <a:avLst/>
-          </a:prstGeom>
-          <a:solidFill>
-            <a:srgbClr val="8C56B3"/>
-          </a:solidFill>
-          <a:ln>
-            <a:noFill/>
-          </a:ln>
-        </p:spPr>
-        <p:txBody>
-          <a:bodyPr rtlCol="0" anchor="ctr"/>
-          <a:lstStyle/>
-          <a:p>
-            <a:pPr algn="ctr"/>
-          </a:p>
-        </p:txBody>
-      </p:sp>
-      <p:sp>
-        <p:nvSpPr>
-          <p:cNvPr id="5" name="장식"/>
-          <p:cNvSpPr/>
-          <p:nvPr/>
-        </p:nvSpPr>
-        <p:spPr>
-          <a:xfrm>
-            <a:off x="8548094" y="665468"/>
-            <a:ext cx="439711" cy="439711"/>
-          </a:xfrm>
-          <a:prstGeom prst="ellipse">
-            <a:avLst/>
-          </a:prstGeom>
-          <a:solidFill>
-            <a:srgbClr val="8C56B3"/>
-          </a:solidFill>
-          <a:ln>
-            <a:noFill/>
-          </a:ln>
-        </p:spPr>
-        <p:txBody>
-          <a:bodyPr rtlCol="0" anchor="ctr"/>
-          <a:lstStyle/>
-          <a:p>
-            <a:pPr algn="ctr"/>
-          </a:p>
-        </p:txBody>
-      </p:sp>
-      <p:sp>
-        <p:nvSpPr>
-          <p:cNvPr id="6" name="장식"/>
-          <p:cNvSpPr/>
-          <p:nvPr/>
-        </p:nvSpPr>
-        <p:spPr>
-          <a:xfrm>
-            <a:off x="9870174" y="2648211"/>
-            <a:ext cx="325546" cy="325546"/>
-          </a:xfrm>
-          <a:prstGeom prst="ellipse">
-            <a:avLst/>
-          </a:prstGeom>
-          <a:solidFill>
-            <a:srgbClr val="E3D3EE"/>
-          </a:solidFill>
-          <a:ln>
-            <a:noFill/>
-          </a:ln>
-        </p:spPr>
-        <p:txBody>
-          <a:bodyPr rtlCol="0" anchor="ctr"/>
-          <a:lstStyle/>
-          <a:p>
-            <a:pPr algn="ctr"/>
-          </a:p>
-        </p:txBody>
-      </p:sp>
-      <p:sp>
-        <p:nvSpPr>
-          <p:cNvPr id="7" name="장식"/>
-          <p:cNvSpPr/>
-          <p:nvPr/>
-        </p:nvSpPr>
-        <p:spPr>
-          <a:xfrm>
-            <a:off x="10456902" y="844189"/>
-            <a:ext cx="428847" cy="428847"/>
-          </a:xfrm>
-          <a:prstGeom prst="ellipse">
-            <a:avLst/>
-          </a:prstGeom>
-          <a:solidFill>
-            <a:srgbClr val="868D3F"/>
-          </a:solidFill>
-          <a:ln>
-            <a:noFill/>
-          </a:ln>
-        </p:spPr>
-        <p:txBody>
-          <a:bodyPr rtlCol="0" anchor="ctr"/>
-          <a:lstStyle/>
-          <a:p>
-            <a:pPr algn="ctr"/>
-          </a:p>
-        </p:txBody>
-      </p:sp>
-      <p:sp>
-        <p:nvSpPr>
-          <p:cNvPr id="8" name="장식"/>
-          <p:cNvSpPr/>
-          <p:nvPr/>
-        </p:nvSpPr>
-        <p:spPr>
-          <a:xfrm>
-            <a:off x="10327883" y="2558810"/>
-            <a:ext cx="383917" cy="383917"/>
-          </a:xfrm>
-          <a:prstGeom prst="ellipse">
-            <a:avLst/>
-          </a:prstGeom>
-          <a:solidFill>
-            <a:srgbClr val="8C56B3"/>
-          </a:solidFill>
-          <a:ln>
-            <a:noFill/>
-          </a:ln>
-        </p:spPr>
-        <p:txBody>
-          <a:bodyPr rtlCol="0" anchor="ctr"/>
-          <a:lstStyle/>
-          <a:p>
-            <a:pPr algn="ctr"/>
-          </a:p>
-        </p:txBody>
-      </p:sp>
-      <p:sp>
-        <p:nvSpPr>
-          <p:cNvPr id="9" name="장식"/>
-          <p:cNvSpPr/>
-          <p:nvPr/>
-        </p:nvSpPr>
-        <p:spPr>
-          <a:xfrm>
-            <a:off x="8985224" y="371263"/>
-            <a:ext cx="271256" cy="271256"/>
-          </a:xfrm>
-          <a:prstGeom prst="ellipse">
-            <a:avLst/>
-          </a:prstGeom>
-          <a:solidFill>
-            <a:srgbClr val="E3D3EE"/>
-          </a:solidFill>
-          <a:ln>
-            <a:noFill/>
-          </a:ln>
-        </p:spPr>
-        <p:txBody>
-          <a:bodyPr rtlCol="0" anchor="ctr"/>
-          <a:lstStyle/>
-          <a:p>
-            <a:pPr algn="ctr"/>
-          </a:p>
-        </p:txBody>
-      </p:sp>
-      <p:sp>
-        <p:nvSpPr>
-          <p:cNvPr id="10" name="장식"/>
-          <p:cNvSpPr/>
-          <p:nvPr/>
-        </p:nvSpPr>
-        <p:spPr>
-          <a:xfrm>
-            <a:off x="10054636" y="427995"/>
-            <a:ext cx="294091" cy="294091"/>
-          </a:xfrm>
-          <a:prstGeom prst="ellipse">
-            <a:avLst/>
-          </a:prstGeom>
-          <a:solidFill>
-            <a:srgbClr val="868D3F"/>
-          </a:solidFill>
-          <a:ln>
-            <a:noFill/>
-          </a:ln>
-        </p:spPr>
-        <p:txBody>
-          <a:bodyPr rtlCol="0" anchor="ctr"/>
-          <a:lstStyle/>
-          <a:p>
-            <a:pPr algn="ctr"/>
-          </a:p>
-        </p:txBody>
-      </p:sp>
-      <p:sp>
-        <p:nvSpPr>
-          <p:cNvPr id="11" name="장식"/>
-          <p:cNvSpPr/>
-          <p:nvPr/>
-        </p:nvSpPr>
-        <p:spPr>
-          <a:xfrm>
-            <a:off x="10539235" y="2844566"/>
-            <a:ext cx="506986" cy="506986"/>
-          </a:xfrm>
-          <a:prstGeom prst="ellipse">
-            <a:avLst/>
-          </a:prstGeom>
-          <a:solidFill>
-            <a:srgbClr val="8C56B3"/>
-          </a:solidFill>
-          <a:ln>
-            <a:noFill/>
-          </a:ln>
-        </p:spPr>
-        <p:txBody>
-          <a:bodyPr rtlCol="0" anchor="ctr"/>
-          <a:lstStyle/>
-          <a:p>
-            <a:pPr algn="ctr"/>
-          </a:p>
-        </p:txBody>
-      </p:sp>
-      <p:sp>
-        <p:nvSpPr>
-          <p:cNvPr id="12" name="장식"/>
-          <p:cNvSpPr/>
-          <p:nvPr/>
-        </p:nvSpPr>
-        <p:spPr>
-          <a:xfrm>
-            <a:off x="9714677" y="793042"/>
-            <a:ext cx="486841" cy="486841"/>
-          </a:xfrm>
-          <a:prstGeom prst="ellipse">
-            <a:avLst/>
-          </a:prstGeom>
-          <a:solidFill>
-            <a:srgbClr val="E3D3EE"/>
-          </a:solidFill>
-          <a:ln>
-            <a:noFill/>
-          </a:ln>
-        </p:spPr>
-        <p:txBody>
-          <a:bodyPr rtlCol="0" anchor="ctr"/>
-          <a:lstStyle/>
-          <a:p>
-            <a:pPr algn="ctr"/>
-          </a:p>
-        </p:txBody>
-      </p:sp>
-      <p:sp>
-        <p:nvSpPr>
-          <p:cNvPr id="13" name="장식"/>
-          <p:cNvSpPr/>
-          <p:nvPr/>
-        </p:nvSpPr>
-        <p:spPr>
-          <a:xfrm>
-            <a:off x="9093804" y="730731"/>
-            <a:ext cx="496258" cy="496258"/>
-          </a:xfrm>
-          <a:prstGeom prst="ellipse">
-            <a:avLst/>
-          </a:prstGeom>
-          <a:solidFill>
-            <a:srgbClr val="868D3F"/>
-          </a:solidFill>
-          <a:ln>
-            <a:noFill/>
-          </a:ln>
-        </p:spPr>
-        <p:txBody>
-          <a:bodyPr rtlCol="0" anchor="ctr"/>
-          <a:lstStyle/>
-          <a:p>
-            <a:pPr algn="ctr"/>
-          </a:p>
-        </p:txBody>
-      </p:sp>
-      <p:sp>
-        <p:nvSpPr>
-          <p:cNvPr id="14" name="장식"/>
-          <p:cNvSpPr/>
-          <p:nvPr/>
-        </p:nvSpPr>
-        <p:spPr>
-          <a:xfrm>
-            <a:off x="8263488" y="21126"/>
-            <a:ext cx="405194" cy="405194"/>
-          </a:xfrm>
-          <a:prstGeom prst="ellipse">
-            <a:avLst/>
-          </a:prstGeom>
-          <a:solidFill>
-            <a:srgbClr val="8C56B3"/>
-          </a:solidFill>
-          <a:ln>
-            <a:noFill/>
-          </a:ln>
-        </p:spPr>
-        <p:txBody>
-          <a:bodyPr rtlCol="0" anchor="ctr"/>
-          <a:lstStyle/>
-          <a:p>
-            <a:pPr algn="ctr"/>
-          </a:p>
-        </p:txBody>
-      </p:sp>
-      <p:sp>
-        <p:nvSpPr>
-          <p:cNvPr id="15" name="장식"/>
-          <p:cNvSpPr/>
-          <p:nvPr/>
-        </p:nvSpPr>
-        <p:spPr>
-          <a:xfrm>
-            <a:off x="10553950" y="2861152"/>
-            <a:ext cx="241523" cy="241523"/>
-          </a:xfrm>
-          <a:prstGeom prst="ellipse">
-            <a:avLst/>
-          </a:prstGeom>
-          <a:solidFill>
-            <a:srgbClr val="E3D3EE"/>
-          </a:solidFill>
-          <a:ln>
-            <a:noFill/>
-          </a:ln>
-        </p:spPr>
-        <p:txBody>
-          <a:bodyPr rtlCol="0" anchor="ctr"/>
-          <a:lstStyle/>
-          <a:p>
-            <a:pPr algn="ctr"/>
-          </a:p>
-        </p:txBody>
-      </p:sp>
+        </p:spPr>
+      </p:pic>
       <p:sp>
         <p:nvSpPr>
           <p:cNvPr id="2" name="Title 1"/>
@@ -3691,7 +3330,7 @@
         <p:spPr>
           <a:xfrm>
             <a:off x="853418" y="2057400"/>
-            <a:ext cx="6705432" cy="1463040"/>
+            <a:ext cx="6095847" cy="1554480"/>
           </a:xfrm>
         </p:spPr>
         <p:txBody>
@@ -3711,20 +3350,20 @@
                   <a:srgbClr val="573371"/>
                 </a:solidFill>
               </a:rPr>
-              <a:t>두 사람이 하나 되는 날</a:t>
-            </a:r>
-          </a:p>
-        </p:txBody>
-      </p:sp>
-      <p:sp>
-        <p:nvSpPr>
-          <p:cNvPr id="16" name="한 줄 문구"/>
+              <a:t>저희 결혼합니다</a:t>
+            </a:r>
+          </a:p>
+        </p:txBody>
+      </p:sp>
+      <p:sp>
+        <p:nvSpPr>
+          <p:cNvPr id="4" name="한 줄 문구"/>
           <p:cNvSpPr txBox="1"/>
           <p:nvPr/>
         </p:nvSpPr>
         <p:spPr>
           <a:xfrm>
-            <a:off x="853418" y="3611880"/>
+            <a:off x="853418" y="3749039"/>
             <a:ext cx="6095847" cy="822960"/>
           </a:xfrm>
           <a:prstGeom prst="rect">
@@ -3749,20 +3388,20 @@
                   <a:srgbClr val="573371"/>
                 </a:solidFill>
               </a:rPr>
-              <a:t>라일락 향기처럼 은은한 사랑을 하겠습니다</a:t>
-            </a:r>
-          </a:p>
-        </p:txBody>
-      </p:sp>
-      <p:sp>
-        <p:nvSpPr>
-          <p:cNvPr id="17" name="안내 문구"/>
+              <a:t>오래 만난 사이, 이제 같이 삽니다</a:t>
+            </a:r>
+          </a:p>
+        </p:txBody>
+      </p:sp>
+      <p:sp>
+        <p:nvSpPr>
+          <p:cNvPr id="5" name="안내 문구"/>
           <p:cNvSpPr txBox="1"/>
           <p:nvPr/>
         </p:nvSpPr>
         <p:spPr>
           <a:xfrm>
-            <a:off x="853418" y="4480560"/>
+            <a:off x="853418" y="4617720"/>
             <a:ext cx="6095847" cy="914400"/>
           </a:xfrm>
           <a:prstGeom prst="rect">
@@ -3802,7 +3441,7 @@
                   <a:srgbClr val="666666"/>
                 </a:solidFill>
               </a:rPr>
-              <a:t>2026. 00. 00 · 예식장 이름</a:t>
+              <a:t>2027. 00. 00 · 예식장 이름</a:t>
             </a:r>
           </a:p>
         </p:txBody>
@@ -3893,325 +3532,6 @@
       </p:sp>
       <p:sp>
         <p:nvSpPr>
-          <p:cNvPr id="5" name="장식"/>
-          <p:cNvSpPr/>
-          <p:nvPr/>
-        </p:nvSpPr>
-        <p:spPr>
-          <a:xfrm>
-            <a:off x="10902130" y="434860"/>
-            <a:ext cx="153549" cy="153549"/>
-          </a:xfrm>
-          <a:prstGeom prst="ellipse">
-            <a:avLst/>
-          </a:prstGeom>
-          <a:solidFill>
-            <a:srgbClr val="8C56B3"/>
-          </a:solidFill>
-          <a:ln>
-            <a:noFill/>
-          </a:ln>
-        </p:spPr>
-        <p:txBody>
-          <a:bodyPr rtlCol="0" anchor="ctr"/>
-          <a:lstStyle/>
-          <a:p>
-            <a:pPr algn="ctr"/>
-          </a:p>
-        </p:txBody>
-      </p:sp>
-      <p:sp>
-        <p:nvSpPr>
-          <p:cNvPr id="6" name="장식"/>
-          <p:cNvSpPr/>
-          <p:nvPr/>
-        </p:nvSpPr>
-        <p:spPr>
-          <a:xfrm>
-            <a:off x="11363808" y="1127246"/>
-            <a:ext cx="113682" cy="113682"/>
-          </a:xfrm>
-          <a:prstGeom prst="ellipse">
-            <a:avLst/>
-          </a:prstGeom>
-          <a:solidFill>
-            <a:srgbClr val="E3D3EE"/>
-          </a:solidFill>
-          <a:ln>
-            <a:noFill/>
-          </a:ln>
-        </p:spPr>
-        <p:txBody>
-          <a:bodyPr rtlCol="0" anchor="ctr"/>
-          <a:lstStyle/>
-          <a:p>
-            <a:pPr algn="ctr"/>
-          </a:p>
-        </p:txBody>
-      </p:sp>
-      <p:sp>
-        <p:nvSpPr>
-          <p:cNvPr id="7" name="장식"/>
-          <p:cNvSpPr/>
-          <p:nvPr/>
-        </p:nvSpPr>
-        <p:spPr>
-          <a:xfrm>
-            <a:off x="11568698" y="497270"/>
-            <a:ext cx="149756" cy="149756"/>
-          </a:xfrm>
-          <a:prstGeom prst="ellipse">
-            <a:avLst/>
-          </a:prstGeom>
-          <a:solidFill>
-            <a:srgbClr val="868D3F"/>
-          </a:solidFill>
-          <a:ln>
-            <a:noFill/>
-          </a:ln>
-        </p:spPr>
-        <p:txBody>
-          <a:bodyPr rtlCol="0" anchor="ctr"/>
-          <a:lstStyle/>
-          <a:p>
-            <a:pPr algn="ctr"/>
-          </a:p>
-        </p:txBody>
-      </p:sp>
-      <p:sp>
-        <p:nvSpPr>
-          <p:cNvPr id="8" name="장식"/>
-          <p:cNvSpPr/>
-          <p:nvPr/>
-        </p:nvSpPr>
-        <p:spPr>
-          <a:xfrm>
-            <a:off x="11523643" y="1096027"/>
-            <a:ext cx="134066" cy="134066"/>
-          </a:xfrm>
-          <a:prstGeom prst="ellipse">
-            <a:avLst/>
-          </a:prstGeom>
-          <a:solidFill>
-            <a:srgbClr val="8C56B3"/>
-          </a:solidFill>
-          <a:ln>
-            <a:noFill/>
-          </a:ln>
-        </p:spPr>
-        <p:txBody>
-          <a:bodyPr rtlCol="0" anchor="ctr"/>
-          <a:lstStyle/>
-          <a:p>
-            <a:pPr algn="ctr"/>
-          </a:p>
-        </p:txBody>
-      </p:sp>
-      <p:sp>
-        <p:nvSpPr>
-          <p:cNvPr id="9" name="장식"/>
-          <p:cNvSpPr/>
-          <p:nvPr/>
-        </p:nvSpPr>
-        <p:spPr>
-          <a:xfrm>
-            <a:off x="11054778" y="332121"/>
-            <a:ext cx="94724" cy="94724"/>
-          </a:xfrm>
-          <a:prstGeom prst="ellipse">
-            <a:avLst/>
-          </a:prstGeom>
-          <a:solidFill>
-            <a:srgbClr val="E3D3EE"/>
-          </a:solidFill>
-          <a:ln>
-            <a:noFill/>
-          </a:ln>
-        </p:spPr>
-        <p:txBody>
-          <a:bodyPr rtlCol="0" anchor="ctr"/>
-          <a:lstStyle/>
-          <a:p>
-            <a:pPr algn="ctr"/>
-          </a:p>
-        </p:txBody>
-      </p:sp>
-      <p:sp>
-        <p:nvSpPr>
-          <p:cNvPr id="10" name="장식"/>
-          <p:cNvSpPr/>
-          <p:nvPr/>
-        </p:nvSpPr>
-        <p:spPr>
-          <a:xfrm>
-            <a:off x="11428224" y="351933"/>
-            <a:ext cx="102698" cy="102698"/>
-          </a:xfrm>
-          <a:prstGeom prst="ellipse">
-            <a:avLst/>
-          </a:prstGeom>
-          <a:solidFill>
-            <a:srgbClr val="868D3F"/>
-          </a:solidFill>
-          <a:ln>
-            <a:noFill/>
-          </a:ln>
-        </p:spPr>
-        <p:txBody>
-          <a:bodyPr rtlCol="0" anchor="ctr"/>
-          <a:lstStyle/>
-          <a:p>
-            <a:pPr algn="ctr"/>
-          </a:p>
-        </p:txBody>
-      </p:sp>
-      <p:sp>
-        <p:nvSpPr>
-          <p:cNvPr id="11" name="장식"/>
-          <p:cNvSpPr/>
-          <p:nvPr/>
-        </p:nvSpPr>
-        <p:spPr>
-          <a:xfrm>
-            <a:off x="11597449" y="1195815"/>
-            <a:ext cx="177042" cy="177042"/>
-          </a:xfrm>
-          <a:prstGeom prst="ellipse">
-            <a:avLst/>
-          </a:prstGeom>
-          <a:solidFill>
-            <a:srgbClr val="8C56B3"/>
-          </a:solidFill>
-          <a:ln>
-            <a:noFill/>
-          </a:ln>
-        </p:spPr>
-        <p:txBody>
-          <a:bodyPr rtlCol="0" anchor="ctr"/>
-          <a:lstStyle/>
-          <a:p>
-            <a:pPr algn="ctr"/>
-          </a:p>
-        </p:txBody>
-      </p:sp>
-      <p:sp>
-        <p:nvSpPr>
-          <p:cNvPr id="12" name="장식"/>
-          <p:cNvSpPr/>
-          <p:nvPr/>
-        </p:nvSpPr>
-        <p:spPr>
-          <a:xfrm>
-            <a:off x="11309508" y="479409"/>
-            <a:ext cx="170008" cy="170008"/>
-          </a:xfrm>
-          <a:prstGeom prst="ellipse">
-            <a:avLst/>
-          </a:prstGeom>
-          <a:solidFill>
-            <a:srgbClr val="E3D3EE"/>
-          </a:solidFill>
-          <a:ln>
-            <a:noFill/>
-          </a:ln>
-        </p:spPr>
-        <p:txBody>
-          <a:bodyPr rtlCol="0" anchor="ctr"/>
-          <a:lstStyle/>
-          <a:p>
-            <a:pPr algn="ctr"/>
-          </a:p>
-        </p:txBody>
-      </p:sp>
-      <p:sp>
-        <p:nvSpPr>
-          <p:cNvPr id="13" name="장식"/>
-          <p:cNvSpPr/>
-          <p:nvPr/>
-        </p:nvSpPr>
-        <p:spPr>
-          <a:xfrm>
-            <a:off x="11092695" y="457650"/>
-            <a:ext cx="173296" cy="173296"/>
-          </a:xfrm>
-          <a:prstGeom prst="ellipse">
-            <a:avLst/>
-          </a:prstGeom>
-          <a:solidFill>
-            <a:srgbClr val="868D3F"/>
-          </a:solidFill>
-          <a:ln>
-            <a:noFill/>
-          </a:ln>
-        </p:spPr>
-        <p:txBody>
-          <a:bodyPr rtlCol="0" anchor="ctr"/>
-          <a:lstStyle/>
-          <a:p>
-            <a:pPr algn="ctr"/>
-          </a:p>
-        </p:txBody>
-      </p:sp>
-      <p:sp>
-        <p:nvSpPr>
-          <p:cNvPr id="14" name="장식"/>
-          <p:cNvSpPr/>
-          <p:nvPr/>
-        </p:nvSpPr>
-        <p:spPr>
-          <a:xfrm>
-            <a:off x="10802743" y="209851"/>
-            <a:ext cx="141496" cy="141496"/>
-          </a:xfrm>
-          <a:prstGeom prst="ellipse">
-            <a:avLst/>
-          </a:prstGeom>
-          <a:solidFill>
-            <a:srgbClr val="8C56B3"/>
-          </a:solidFill>
-          <a:ln>
-            <a:noFill/>
-          </a:ln>
-        </p:spPr>
-        <p:txBody>
-          <a:bodyPr rtlCol="0" anchor="ctr"/>
-          <a:lstStyle/>
-          <a:p>
-            <a:pPr algn="ctr"/>
-          </a:p>
-        </p:txBody>
-      </p:sp>
-      <p:sp>
-        <p:nvSpPr>
-          <p:cNvPr id="15" name="장식"/>
-          <p:cNvSpPr/>
-          <p:nvPr/>
-        </p:nvSpPr>
-        <p:spPr>
-          <a:xfrm>
-            <a:off x="11602587" y="1201606"/>
-            <a:ext cx="84341" cy="84341"/>
-          </a:xfrm>
-          <a:prstGeom prst="ellipse">
-            <a:avLst/>
-          </a:prstGeom>
-          <a:solidFill>
-            <a:srgbClr val="E3D3EE"/>
-          </a:solidFill>
-          <a:ln>
-            <a:noFill/>
-          </a:ln>
-        </p:spPr>
-        <p:txBody>
-          <a:bodyPr rtlCol="0" anchor="ctr"/>
-          <a:lstStyle/>
-          <a:p>
-            <a:pPr algn="ctr"/>
-          </a:p>
-        </p:txBody>
-      </p:sp>
-      <p:sp>
-        <p:nvSpPr>
           <p:cNvPr id="2" name="Title 1"/>
           <p:cNvSpPr>
             <a:spLocks noGrp="1"/>
@@ -4250,7 +3570,7 @@
       </p:sp>
       <p:sp>
         <p:nvSpPr>
-          <p:cNvPr id="16" name="사진 자리"/>
+          <p:cNvPr id="5" name="사진 자리"/>
           <p:cNvSpPr/>
           <p:nvPr/>
         </p:nvSpPr>
@@ -4296,7 +3616,7 @@
       </p:sp>
       <p:sp>
         <p:nvSpPr>
-          <p:cNvPr id="17" name="TextBox 16"/>
+          <p:cNvPr id="6" name="TextBox 5"/>
           <p:cNvSpPr txBox="1"/>
           <p:nvPr/>
         </p:nvSpPr>
@@ -4334,7 +3654,7 @@
       </p:sp>
       <p:sp>
         <p:nvSpPr>
-          <p:cNvPr id="18" name="TextBox 17"/>
+          <p:cNvPr id="7" name="TextBox 6"/>
           <p:cNvSpPr txBox="1"/>
           <p:nvPr/>
         </p:nvSpPr>
@@ -4402,7 +3722,7 @@
       </p:sp>
       <p:sp>
         <p:nvSpPr>
-          <p:cNvPr id="19" name="사진 자리"/>
+          <p:cNvPr id="8" name="사진 자리"/>
           <p:cNvSpPr/>
           <p:nvPr/>
         </p:nvSpPr>
@@ -4448,7 +3768,7 @@
       </p:sp>
       <p:sp>
         <p:nvSpPr>
-          <p:cNvPr id="20" name="TextBox 19"/>
+          <p:cNvPr id="9" name="TextBox 8"/>
           <p:cNvSpPr txBox="1"/>
           <p:nvPr/>
         </p:nvSpPr>
@@ -4486,7 +3806,7 @@
       </p:sp>
       <p:sp>
         <p:nvSpPr>
-          <p:cNvPr id="21" name="TextBox 20"/>
+          <p:cNvPr id="10" name="TextBox 9"/>
           <p:cNvSpPr txBox="1"/>
           <p:nvPr/>
         </p:nvSpPr>
@@ -4638,325 +3958,6 @@
       </p:sp>
       <p:sp>
         <p:nvSpPr>
-          <p:cNvPr id="5" name="장식"/>
-          <p:cNvSpPr/>
-          <p:nvPr/>
-        </p:nvSpPr>
-        <p:spPr>
-          <a:xfrm>
-            <a:off x="10902130" y="434860"/>
-            <a:ext cx="153549" cy="153549"/>
-          </a:xfrm>
-          <a:prstGeom prst="ellipse">
-            <a:avLst/>
-          </a:prstGeom>
-          <a:solidFill>
-            <a:srgbClr val="8C56B3"/>
-          </a:solidFill>
-          <a:ln>
-            <a:noFill/>
-          </a:ln>
-        </p:spPr>
-        <p:txBody>
-          <a:bodyPr rtlCol="0" anchor="ctr"/>
-          <a:lstStyle/>
-          <a:p>
-            <a:pPr algn="ctr"/>
-          </a:p>
-        </p:txBody>
-      </p:sp>
-      <p:sp>
-        <p:nvSpPr>
-          <p:cNvPr id="6" name="장식"/>
-          <p:cNvSpPr/>
-          <p:nvPr/>
-        </p:nvSpPr>
-        <p:spPr>
-          <a:xfrm>
-            <a:off x="11363808" y="1127246"/>
-            <a:ext cx="113682" cy="113682"/>
-          </a:xfrm>
-          <a:prstGeom prst="ellipse">
-            <a:avLst/>
-          </a:prstGeom>
-          <a:solidFill>
-            <a:srgbClr val="E3D3EE"/>
-          </a:solidFill>
-          <a:ln>
-            <a:noFill/>
-          </a:ln>
-        </p:spPr>
-        <p:txBody>
-          <a:bodyPr rtlCol="0" anchor="ctr"/>
-          <a:lstStyle/>
-          <a:p>
-            <a:pPr algn="ctr"/>
-          </a:p>
-        </p:txBody>
-      </p:sp>
-      <p:sp>
-        <p:nvSpPr>
-          <p:cNvPr id="7" name="장식"/>
-          <p:cNvSpPr/>
-          <p:nvPr/>
-        </p:nvSpPr>
-        <p:spPr>
-          <a:xfrm>
-            <a:off x="11568698" y="497270"/>
-            <a:ext cx="149756" cy="149756"/>
-          </a:xfrm>
-          <a:prstGeom prst="ellipse">
-            <a:avLst/>
-          </a:prstGeom>
-          <a:solidFill>
-            <a:srgbClr val="868D3F"/>
-          </a:solidFill>
-          <a:ln>
-            <a:noFill/>
-          </a:ln>
-        </p:spPr>
-        <p:txBody>
-          <a:bodyPr rtlCol="0" anchor="ctr"/>
-          <a:lstStyle/>
-          <a:p>
-            <a:pPr algn="ctr"/>
-          </a:p>
-        </p:txBody>
-      </p:sp>
-      <p:sp>
-        <p:nvSpPr>
-          <p:cNvPr id="8" name="장식"/>
-          <p:cNvSpPr/>
-          <p:nvPr/>
-        </p:nvSpPr>
-        <p:spPr>
-          <a:xfrm>
-            <a:off x="11523643" y="1096027"/>
-            <a:ext cx="134066" cy="134066"/>
-          </a:xfrm>
-          <a:prstGeom prst="ellipse">
-            <a:avLst/>
-          </a:prstGeom>
-          <a:solidFill>
-            <a:srgbClr val="8C56B3"/>
-          </a:solidFill>
-          <a:ln>
-            <a:noFill/>
-          </a:ln>
-        </p:spPr>
-        <p:txBody>
-          <a:bodyPr rtlCol="0" anchor="ctr"/>
-          <a:lstStyle/>
-          <a:p>
-            <a:pPr algn="ctr"/>
-          </a:p>
-        </p:txBody>
-      </p:sp>
-      <p:sp>
-        <p:nvSpPr>
-          <p:cNvPr id="9" name="장식"/>
-          <p:cNvSpPr/>
-          <p:nvPr/>
-        </p:nvSpPr>
-        <p:spPr>
-          <a:xfrm>
-            <a:off x="11054778" y="332121"/>
-            <a:ext cx="94724" cy="94724"/>
-          </a:xfrm>
-          <a:prstGeom prst="ellipse">
-            <a:avLst/>
-          </a:prstGeom>
-          <a:solidFill>
-            <a:srgbClr val="E3D3EE"/>
-          </a:solidFill>
-          <a:ln>
-            <a:noFill/>
-          </a:ln>
-        </p:spPr>
-        <p:txBody>
-          <a:bodyPr rtlCol="0" anchor="ctr"/>
-          <a:lstStyle/>
-          <a:p>
-            <a:pPr algn="ctr"/>
-          </a:p>
-        </p:txBody>
-      </p:sp>
-      <p:sp>
-        <p:nvSpPr>
-          <p:cNvPr id="10" name="장식"/>
-          <p:cNvSpPr/>
-          <p:nvPr/>
-        </p:nvSpPr>
-        <p:spPr>
-          <a:xfrm>
-            <a:off x="11428224" y="351933"/>
-            <a:ext cx="102698" cy="102698"/>
-          </a:xfrm>
-          <a:prstGeom prst="ellipse">
-            <a:avLst/>
-          </a:prstGeom>
-          <a:solidFill>
-            <a:srgbClr val="868D3F"/>
-          </a:solidFill>
-          <a:ln>
-            <a:noFill/>
-          </a:ln>
-        </p:spPr>
-        <p:txBody>
-          <a:bodyPr rtlCol="0" anchor="ctr"/>
-          <a:lstStyle/>
-          <a:p>
-            <a:pPr algn="ctr"/>
-          </a:p>
-        </p:txBody>
-      </p:sp>
-      <p:sp>
-        <p:nvSpPr>
-          <p:cNvPr id="11" name="장식"/>
-          <p:cNvSpPr/>
-          <p:nvPr/>
-        </p:nvSpPr>
-        <p:spPr>
-          <a:xfrm>
-            <a:off x="11597449" y="1195815"/>
-            <a:ext cx="177042" cy="177042"/>
-          </a:xfrm>
-          <a:prstGeom prst="ellipse">
-            <a:avLst/>
-          </a:prstGeom>
-          <a:solidFill>
-            <a:srgbClr val="8C56B3"/>
-          </a:solidFill>
-          <a:ln>
-            <a:noFill/>
-          </a:ln>
-        </p:spPr>
-        <p:txBody>
-          <a:bodyPr rtlCol="0" anchor="ctr"/>
-          <a:lstStyle/>
-          <a:p>
-            <a:pPr algn="ctr"/>
-          </a:p>
-        </p:txBody>
-      </p:sp>
-      <p:sp>
-        <p:nvSpPr>
-          <p:cNvPr id="12" name="장식"/>
-          <p:cNvSpPr/>
-          <p:nvPr/>
-        </p:nvSpPr>
-        <p:spPr>
-          <a:xfrm>
-            <a:off x="11309508" y="479409"/>
-            <a:ext cx="170008" cy="170008"/>
-          </a:xfrm>
-          <a:prstGeom prst="ellipse">
-            <a:avLst/>
-          </a:prstGeom>
-          <a:solidFill>
-            <a:srgbClr val="E3D3EE"/>
-          </a:solidFill>
-          <a:ln>
-            <a:noFill/>
-          </a:ln>
-        </p:spPr>
-        <p:txBody>
-          <a:bodyPr rtlCol="0" anchor="ctr"/>
-          <a:lstStyle/>
-          <a:p>
-            <a:pPr algn="ctr"/>
-          </a:p>
-        </p:txBody>
-      </p:sp>
-      <p:sp>
-        <p:nvSpPr>
-          <p:cNvPr id="13" name="장식"/>
-          <p:cNvSpPr/>
-          <p:nvPr/>
-        </p:nvSpPr>
-        <p:spPr>
-          <a:xfrm>
-            <a:off x="11092695" y="457650"/>
-            <a:ext cx="173296" cy="173296"/>
-          </a:xfrm>
-          <a:prstGeom prst="ellipse">
-            <a:avLst/>
-          </a:prstGeom>
-          <a:solidFill>
-            <a:srgbClr val="868D3F"/>
-          </a:solidFill>
-          <a:ln>
-            <a:noFill/>
-          </a:ln>
-        </p:spPr>
-        <p:txBody>
-          <a:bodyPr rtlCol="0" anchor="ctr"/>
-          <a:lstStyle/>
-          <a:p>
-            <a:pPr algn="ctr"/>
-          </a:p>
-        </p:txBody>
-      </p:sp>
-      <p:sp>
-        <p:nvSpPr>
-          <p:cNvPr id="14" name="장식"/>
-          <p:cNvSpPr/>
-          <p:nvPr/>
-        </p:nvSpPr>
-        <p:spPr>
-          <a:xfrm>
-            <a:off x="10802743" y="209851"/>
-            <a:ext cx="141496" cy="141496"/>
-          </a:xfrm>
-          <a:prstGeom prst="ellipse">
-            <a:avLst/>
-          </a:prstGeom>
-          <a:solidFill>
-            <a:srgbClr val="8C56B3"/>
-          </a:solidFill>
-          <a:ln>
-            <a:noFill/>
-          </a:ln>
-        </p:spPr>
-        <p:txBody>
-          <a:bodyPr rtlCol="0" anchor="ctr"/>
-          <a:lstStyle/>
-          <a:p>
-            <a:pPr algn="ctr"/>
-          </a:p>
-        </p:txBody>
-      </p:sp>
-      <p:sp>
-        <p:nvSpPr>
-          <p:cNvPr id="15" name="장식"/>
-          <p:cNvSpPr/>
-          <p:nvPr/>
-        </p:nvSpPr>
-        <p:spPr>
-          <a:xfrm>
-            <a:off x="11602587" y="1201606"/>
-            <a:ext cx="84341" cy="84341"/>
-          </a:xfrm>
-          <a:prstGeom prst="ellipse">
-            <a:avLst/>
-          </a:prstGeom>
-          <a:solidFill>
-            <a:srgbClr val="E3D3EE"/>
-          </a:solidFill>
-          <a:ln>
-            <a:noFill/>
-          </a:ln>
-        </p:spPr>
-        <p:txBody>
-          <a:bodyPr rtlCol="0" anchor="ctr"/>
-          <a:lstStyle/>
-          <a:p>
-            <a:pPr algn="ctr"/>
-          </a:p>
-        </p:txBody>
-      </p:sp>
-      <p:sp>
-        <p:nvSpPr>
           <p:cNvPr id="2" name="Title 1"/>
           <p:cNvSpPr>
             <a:spLocks noGrp="1"/>
@@ -4995,7 +3996,7 @@
       </p:sp>
       <p:sp>
         <p:nvSpPr>
-          <p:cNvPr id="16" name="왼쪽 칸"/>
+          <p:cNvPr id="5" name="왼쪽 칸"/>
           <p:cNvSpPr/>
           <p:nvPr/>
         </p:nvSpPr>
@@ -5028,7 +4029,7 @@
       </p:sp>
       <p:sp>
         <p:nvSpPr>
-          <p:cNvPr id="17" name="칸 제목 바"/>
+          <p:cNvPr id="6" name="칸 제목 바"/>
           <p:cNvSpPr/>
           <p:nvPr/>
         </p:nvSpPr>
@@ -5059,7 +4060,7 @@
       </p:sp>
       <p:sp>
         <p:nvSpPr>
-          <p:cNvPr id="18" name="TextBox 17"/>
+          <p:cNvPr id="7" name="TextBox 6"/>
           <p:cNvSpPr txBox="1"/>
           <p:nvPr/>
         </p:nvSpPr>
@@ -5097,7 +4098,7 @@
       </p:sp>
       <p:sp>
         <p:nvSpPr>
-          <p:cNvPr id="19" name="TextBox 18"/>
+          <p:cNvPr id="8" name="TextBox 7"/>
           <p:cNvSpPr txBox="1"/>
           <p:nvPr/>
         </p:nvSpPr>
@@ -5180,7 +4181,7 @@
       </p:sp>
       <p:sp>
         <p:nvSpPr>
-          <p:cNvPr id="20" name="오른쪽 칸"/>
+          <p:cNvPr id="9" name="오른쪽 칸"/>
           <p:cNvSpPr/>
           <p:nvPr/>
         </p:nvSpPr>
@@ -5213,7 +4214,7 @@
       </p:sp>
       <p:sp>
         <p:nvSpPr>
-          <p:cNvPr id="21" name="칸 제목 바"/>
+          <p:cNvPr id="10" name="칸 제목 바"/>
           <p:cNvSpPr/>
           <p:nvPr/>
         </p:nvSpPr>
@@ -5244,7 +4245,7 @@
       </p:sp>
       <p:sp>
         <p:nvSpPr>
-          <p:cNvPr id="22" name="TextBox 21"/>
+          <p:cNvPr id="11" name="TextBox 10"/>
           <p:cNvSpPr txBox="1"/>
           <p:nvPr/>
         </p:nvSpPr>
@@ -5282,7 +4283,7 @@
       </p:sp>
       <p:sp>
         <p:nvSpPr>
-          <p:cNvPr id="23" name="TextBox 22"/>
+          <p:cNvPr id="12" name="TextBox 11"/>
           <p:cNvSpPr txBox="1"/>
           <p:nvPr/>
         </p:nvSpPr>
@@ -5449,325 +4450,6 @@
       </p:sp>
       <p:sp>
         <p:nvSpPr>
-          <p:cNvPr id="5" name="장식"/>
-          <p:cNvSpPr/>
-          <p:nvPr/>
-        </p:nvSpPr>
-        <p:spPr>
-          <a:xfrm>
-            <a:off x="10902130" y="434860"/>
-            <a:ext cx="153549" cy="153549"/>
-          </a:xfrm>
-          <a:prstGeom prst="ellipse">
-            <a:avLst/>
-          </a:prstGeom>
-          <a:solidFill>
-            <a:srgbClr val="8C56B3"/>
-          </a:solidFill>
-          <a:ln>
-            <a:noFill/>
-          </a:ln>
-        </p:spPr>
-        <p:txBody>
-          <a:bodyPr rtlCol="0" anchor="ctr"/>
-          <a:lstStyle/>
-          <a:p>
-            <a:pPr algn="ctr"/>
-          </a:p>
-        </p:txBody>
-      </p:sp>
-      <p:sp>
-        <p:nvSpPr>
-          <p:cNvPr id="6" name="장식"/>
-          <p:cNvSpPr/>
-          <p:nvPr/>
-        </p:nvSpPr>
-        <p:spPr>
-          <a:xfrm>
-            <a:off x="11363808" y="1127246"/>
-            <a:ext cx="113682" cy="113682"/>
-          </a:xfrm>
-          <a:prstGeom prst="ellipse">
-            <a:avLst/>
-          </a:prstGeom>
-          <a:solidFill>
-            <a:srgbClr val="E3D3EE"/>
-          </a:solidFill>
-          <a:ln>
-            <a:noFill/>
-          </a:ln>
-        </p:spPr>
-        <p:txBody>
-          <a:bodyPr rtlCol="0" anchor="ctr"/>
-          <a:lstStyle/>
-          <a:p>
-            <a:pPr algn="ctr"/>
-          </a:p>
-        </p:txBody>
-      </p:sp>
-      <p:sp>
-        <p:nvSpPr>
-          <p:cNvPr id="7" name="장식"/>
-          <p:cNvSpPr/>
-          <p:nvPr/>
-        </p:nvSpPr>
-        <p:spPr>
-          <a:xfrm>
-            <a:off x="11568698" y="497270"/>
-            <a:ext cx="149756" cy="149756"/>
-          </a:xfrm>
-          <a:prstGeom prst="ellipse">
-            <a:avLst/>
-          </a:prstGeom>
-          <a:solidFill>
-            <a:srgbClr val="868D3F"/>
-          </a:solidFill>
-          <a:ln>
-            <a:noFill/>
-          </a:ln>
-        </p:spPr>
-        <p:txBody>
-          <a:bodyPr rtlCol="0" anchor="ctr"/>
-          <a:lstStyle/>
-          <a:p>
-            <a:pPr algn="ctr"/>
-          </a:p>
-        </p:txBody>
-      </p:sp>
-      <p:sp>
-        <p:nvSpPr>
-          <p:cNvPr id="8" name="장식"/>
-          <p:cNvSpPr/>
-          <p:nvPr/>
-        </p:nvSpPr>
-        <p:spPr>
-          <a:xfrm>
-            <a:off x="11523643" y="1096027"/>
-            <a:ext cx="134066" cy="134066"/>
-          </a:xfrm>
-          <a:prstGeom prst="ellipse">
-            <a:avLst/>
-          </a:prstGeom>
-          <a:solidFill>
-            <a:srgbClr val="8C56B3"/>
-          </a:solidFill>
-          <a:ln>
-            <a:noFill/>
-          </a:ln>
-        </p:spPr>
-        <p:txBody>
-          <a:bodyPr rtlCol="0" anchor="ctr"/>
-          <a:lstStyle/>
-          <a:p>
-            <a:pPr algn="ctr"/>
-          </a:p>
-        </p:txBody>
-      </p:sp>
-      <p:sp>
-        <p:nvSpPr>
-          <p:cNvPr id="9" name="장식"/>
-          <p:cNvSpPr/>
-          <p:nvPr/>
-        </p:nvSpPr>
-        <p:spPr>
-          <a:xfrm>
-            <a:off x="11054778" y="332121"/>
-            <a:ext cx="94724" cy="94724"/>
-          </a:xfrm>
-          <a:prstGeom prst="ellipse">
-            <a:avLst/>
-          </a:prstGeom>
-          <a:solidFill>
-            <a:srgbClr val="E3D3EE"/>
-          </a:solidFill>
-          <a:ln>
-            <a:noFill/>
-          </a:ln>
-        </p:spPr>
-        <p:txBody>
-          <a:bodyPr rtlCol="0" anchor="ctr"/>
-          <a:lstStyle/>
-          <a:p>
-            <a:pPr algn="ctr"/>
-          </a:p>
-        </p:txBody>
-      </p:sp>
-      <p:sp>
-        <p:nvSpPr>
-          <p:cNvPr id="10" name="장식"/>
-          <p:cNvSpPr/>
-          <p:nvPr/>
-        </p:nvSpPr>
-        <p:spPr>
-          <a:xfrm>
-            <a:off x="11428224" y="351933"/>
-            <a:ext cx="102698" cy="102698"/>
-          </a:xfrm>
-          <a:prstGeom prst="ellipse">
-            <a:avLst/>
-          </a:prstGeom>
-          <a:solidFill>
-            <a:srgbClr val="868D3F"/>
-          </a:solidFill>
-          <a:ln>
-            <a:noFill/>
-          </a:ln>
-        </p:spPr>
-        <p:txBody>
-          <a:bodyPr rtlCol="0" anchor="ctr"/>
-          <a:lstStyle/>
-          <a:p>
-            <a:pPr algn="ctr"/>
-          </a:p>
-        </p:txBody>
-      </p:sp>
-      <p:sp>
-        <p:nvSpPr>
-          <p:cNvPr id="11" name="장식"/>
-          <p:cNvSpPr/>
-          <p:nvPr/>
-        </p:nvSpPr>
-        <p:spPr>
-          <a:xfrm>
-            <a:off x="11597449" y="1195815"/>
-            <a:ext cx="177042" cy="177042"/>
-          </a:xfrm>
-          <a:prstGeom prst="ellipse">
-            <a:avLst/>
-          </a:prstGeom>
-          <a:solidFill>
-            <a:srgbClr val="8C56B3"/>
-          </a:solidFill>
-          <a:ln>
-            <a:noFill/>
-          </a:ln>
-        </p:spPr>
-        <p:txBody>
-          <a:bodyPr rtlCol="0" anchor="ctr"/>
-          <a:lstStyle/>
-          <a:p>
-            <a:pPr algn="ctr"/>
-          </a:p>
-        </p:txBody>
-      </p:sp>
-      <p:sp>
-        <p:nvSpPr>
-          <p:cNvPr id="12" name="장식"/>
-          <p:cNvSpPr/>
-          <p:nvPr/>
-        </p:nvSpPr>
-        <p:spPr>
-          <a:xfrm>
-            <a:off x="11309508" y="479409"/>
-            <a:ext cx="170008" cy="170008"/>
-          </a:xfrm>
-          <a:prstGeom prst="ellipse">
-            <a:avLst/>
-          </a:prstGeom>
-          <a:solidFill>
-            <a:srgbClr val="E3D3EE"/>
-          </a:solidFill>
-          <a:ln>
-            <a:noFill/>
-          </a:ln>
-        </p:spPr>
-        <p:txBody>
-          <a:bodyPr rtlCol="0" anchor="ctr"/>
-          <a:lstStyle/>
-          <a:p>
-            <a:pPr algn="ctr"/>
-          </a:p>
-        </p:txBody>
-      </p:sp>
-      <p:sp>
-        <p:nvSpPr>
-          <p:cNvPr id="13" name="장식"/>
-          <p:cNvSpPr/>
-          <p:nvPr/>
-        </p:nvSpPr>
-        <p:spPr>
-          <a:xfrm>
-            <a:off x="11092695" y="457650"/>
-            <a:ext cx="173296" cy="173296"/>
-          </a:xfrm>
-          <a:prstGeom prst="ellipse">
-            <a:avLst/>
-          </a:prstGeom>
-          <a:solidFill>
-            <a:srgbClr val="868D3F"/>
-          </a:solidFill>
-          <a:ln>
-            <a:noFill/>
-          </a:ln>
-        </p:spPr>
-        <p:txBody>
-          <a:bodyPr rtlCol="0" anchor="ctr"/>
-          <a:lstStyle/>
-          <a:p>
-            <a:pPr algn="ctr"/>
-          </a:p>
-        </p:txBody>
-      </p:sp>
-      <p:sp>
-        <p:nvSpPr>
-          <p:cNvPr id="14" name="장식"/>
-          <p:cNvSpPr/>
-          <p:nvPr/>
-        </p:nvSpPr>
-        <p:spPr>
-          <a:xfrm>
-            <a:off x="10802743" y="209851"/>
-            <a:ext cx="141496" cy="141496"/>
-          </a:xfrm>
-          <a:prstGeom prst="ellipse">
-            <a:avLst/>
-          </a:prstGeom>
-          <a:solidFill>
-            <a:srgbClr val="8C56B3"/>
-          </a:solidFill>
-          <a:ln>
-            <a:noFill/>
-          </a:ln>
-        </p:spPr>
-        <p:txBody>
-          <a:bodyPr rtlCol="0" anchor="ctr"/>
-          <a:lstStyle/>
-          <a:p>
-            <a:pPr algn="ctr"/>
-          </a:p>
-        </p:txBody>
-      </p:sp>
-      <p:sp>
-        <p:nvSpPr>
-          <p:cNvPr id="15" name="장식"/>
-          <p:cNvSpPr/>
-          <p:nvPr/>
-        </p:nvSpPr>
-        <p:spPr>
-          <a:xfrm>
-            <a:off x="11602587" y="1201606"/>
-            <a:ext cx="84341" cy="84341"/>
-          </a:xfrm>
-          <a:prstGeom prst="ellipse">
-            <a:avLst/>
-          </a:prstGeom>
-          <a:solidFill>
-            <a:srgbClr val="E3D3EE"/>
-          </a:solidFill>
-          <a:ln>
-            <a:noFill/>
-          </a:ln>
-        </p:spPr>
-        <p:txBody>
-          <a:bodyPr rtlCol="0" anchor="ctr"/>
-          <a:lstStyle/>
-          <a:p>
-            <a:pPr algn="ctr"/>
-          </a:p>
-        </p:txBody>
-      </p:sp>
-      <p:sp>
-        <p:nvSpPr>
           <p:cNvPr id="2" name="Title 1"/>
           <p:cNvSpPr>
             <a:spLocks noGrp="1"/>
@@ -5806,7 +4488,7 @@
       </p:sp>
       <p:sp>
         <p:nvSpPr>
-          <p:cNvPr id="16" name="왼쪽 칸"/>
+          <p:cNvPr id="5" name="왼쪽 칸"/>
           <p:cNvSpPr/>
           <p:nvPr/>
         </p:nvSpPr>
@@ -5839,7 +4521,7 @@
       </p:sp>
       <p:sp>
         <p:nvSpPr>
-          <p:cNvPr id="17" name="칸 제목 바"/>
+          <p:cNvPr id="6" name="칸 제목 바"/>
           <p:cNvSpPr/>
           <p:nvPr/>
         </p:nvSpPr>
@@ -5870,7 +4552,7 @@
       </p:sp>
       <p:sp>
         <p:nvSpPr>
-          <p:cNvPr id="18" name="TextBox 17"/>
+          <p:cNvPr id="7" name="TextBox 6"/>
           <p:cNvSpPr txBox="1"/>
           <p:nvPr/>
         </p:nvSpPr>
@@ -5908,7 +4590,7 @@
       </p:sp>
       <p:sp>
         <p:nvSpPr>
-          <p:cNvPr id="19" name="TextBox 18"/>
+          <p:cNvPr id="8" name="TextBox 7"/>
           <p:cNvSpPr txBox="1"/>
           <p:nvPr/>
         </p:nvSpPr>
@@ -5951,7 +4633,7 @@
       </p:sp>
       <p:sp>
         <p:nvSpPr>
-          <p:cNvPr id="20" name="오른쪽 칸"/>
+          <p:cNvPr id="9" name="오른쪽 칸"/>
           <p:cNvSpPr/>
           <p:nvPr/>
         </p:nvSpPr>
@@ -5984,7 +4666,7 @@
       </p:sp>
       <p:sp>
         <p:nvSpPr>
-          <p:cNvPr id="21" name="칸 제목 바"/>
+          <p:cNvPr id="10" name="칸 제목 바"/>
           <p:cNvSpPr/>
           <p:nvPr/>
         </p:nvSpPr>
@@ -6015,7 +4697,7 @@
       </p:sp>
       <p:sp>
         <p:nvSpPr>
-          <p:cNvPr id="22" name="TextBox 21"/>
+          <p:cNvPr id="11" name="TextBox 10"/>
           <p:cNvSpPr txBox="1"/>
           <p:nvPr/>
         </p:nvSpPr>
@@ -6053,7 +4735,7 @@
       </p:sp>
       <p:sp>
         <p:nvSpPr>
-          <p:cNvPr id="23" name="TextBox 22"/>
+          <p:cNvPr id="12" name="TextBox 11"/>
           <p:cNvSpPr txBox="1"/>
           <p:nvPr/>
         </p:nvSpPr>
@@ -6180,325 +4862,6 @@
       </p:sp>
       <p:sp>
         <p:nvSpPr>
-          <p:cNvPr id="5" name="장식"/>
-          <p:cNvSpPr/>
-          <p:nvPr/>
-        </p:nvSpPr>
-        <p:spPr>
-          <a:xfrm>
-            <a:off x="10902130" y="434860"/>
-            <a:ext cx="153549" cy="153549"/>
-          </a:xfrm>
-          <a:prstGeom prst="ellipse">
-            <a:avLst/>
-          </a:prstGeom>
-          <a:solidFill>
-            <a:srgbClr val="8C56B3"/>
-          </a:solidFill>
-          <a:ln>
-            <a:noFill/>
-          </a:ln>
-        </p:spPr>
-        <p:txBody>
-          <a:bodyPr rtlCol="0" anchor="ctr"/>
-          <a:lstStyle/>
-          <a:p>
-            <a:pPr algn="ctr"/>
-          </a:p>
-        </p:txBody>
-      </p:sp>
-      <p:sp>
-        <p:nvSpPr>
-          <p:cNvPr id="6" name="장식"/>
-          <p:cNvSpPr/>
-          <p:nvPr/>
-        </p:nvSpPr>
-        <p:spPr>
-          <a:xfrm>
-            <a:off x="11363808" y="1127246"/>
-            <a:ext cx="113682" cy="113682"/>
-          </a:xfrm>
-          <a:prstGeom prst="ellipse">
-            <a:avLst/>
-          </a:prstGeom>
-          <a:solidFill>
-            <a:srgbClr val="E3D3EE"/>
-          </a:solidFill>
-          <a:ln>
-            <a:noFill/>
-          </a:ln>
-        </p:spPr>
-        <p:txBody>
-          <a:bodyPr rtlCol="0" anchor="ctr"/>
-          <a:lstStyle/>
-          <a:p>
-            <a:pPr algn="ctr"/>
-          </a:p>
-        </p:txBody>
-      </p:sp>
-      <p:sp>
-        <p:nvSpPr>
-          <p:cNvPr id="7" name="장식"/>
-          <p:cNvSpPr/>
-          <p:nvPr/>
-        </p:nvSpPr>
-        <p:spPr>
-          <a:xfrm>
-            <a:off x="11568698" y="497270"/>
-            <a:ext cx="149756" cy="149756"/>
-          </a:xfrm>
-          <a:prstGeom prst="ellipse">
-            <a:avLst/>
-          </a:prstGeom>
-          <a:solidFill>
-            <a:srgbClr val="868D3F"/>
-          </a:solidFill>
-          <a:ln>
-            <a:noFill/>
-          </a:ln>
-        </p:spPr>
-        <p:txBody>
-          <a:bodyPr rtlCol="0" anchor="ctr"/>
-          <a:lstStyle/>
-          <a:p>
-            <a:pPr algn="ctr"/>
-          </a:p>
-        </p:txBody>
-      </p:sp>
-      <p:sp>
-        <p:nvSpPr>
-          <p:cNvPr id="8" name="장식"/>
-          <p:cNvSpPr/>
-          <p:nvPr/>
-        </p:nvSpPr>
-        <p:spPr>
-          <a:xfrm>
-            <a:off x="11523643" y="1096027"/>
-            <a:ext cx="134066" cy="134066"/>
-          </a:xfrm>
-          <a:prstGeom prst="ellipse">
-            <a:avLst/>
-          </a:prstGeom>
-          <a:solidFill>
-            <a:srgbClr val="8C56B3"/>
-          </a:solidFill>
-          <a:ln>
-            <a:noFill/>
-          </a:ln>
-        </p:spPr>
-        <p:txBody>
-          <a:bodyPr rtlCol="0" anchor="ctr"/>
-          <a:lstStyle/>
-          <a:p>
-            <a:pPr algn="ctr"/>
-          </a:p>
-        </p:txBody>
-      </p:sp>
-      <p:sp>
-        <p:nvSpPr>
-          <p:cNvPr id="9" name="장식"/>
-          <p:cNvSpPr/>
-          <p:nvPr/>
-        </p:nvSpPr>
-        <p:spPr>
-          <a:xfrm>
-            <a:off x="11054778" y="332121"/>
-            <a:ext cx="94724" cy="94724"/>
-          </a:xfrm>
-          <a:prstGeom prst="ellipse">
-            <a:avLst/>
-          </a:prstGeom>
-          <a:solidFill>
-            <a:srgbClr val="E3D3EE"/>
-          </a:solidFill>
-          <a:ln>
-            <a:noFill/>
-          </a:ln>
-        </p:spPr>
-        <p:txBody>
-          <a:bodyPr rtlCol="0" anchor="ctr"/>
-          <a:lstStyle/>
-          <a:p>
-            <a:pPr algn="ctr"/>
-          </a:p>
-        </p:txBody>
-      </p:sp>
-      <p:sp>
-        <p:nvSpPr>
-          <p:cNvPr id="10" name="장식"/>
-          <p:cNvSpPr/>
-          <p:nvPr/>
-        </p:nvSpPr>
-        <p:spPr>
-          <a:xfrm>
-            <a:off x="11428224" y="351933"/>
-            <a:ext cx="102698" cy="102698"/>
-          </a:xfrm>
-          <a:prstGeom prst="ellipse">
-            <a:avLst/>
-          </a:prstGeom>
-          <a:solidFill>
-            <a:srgbClr val="868D3F"/>
-          </a:solidFill>
-          <a:ln>
-            <a:noFill/>
-          </a:ln>
-        </p:spPr>
-        <p:txBody>
-          <a:bodyPr rtlCol="0" anchor="ctr"/>
-          <a:lstStyle/>
-          <a:p>
-            <a:pPr algn="ctr"/>
-          </a:p>
-        </p:txBody>
-      </p:sp>
-      <p:sp>
-        <p:nvSpPr>
-          <p:cNvPr id="11" name="장식"/>
-          <p:cNvSpPr/>
-          <p:nvPr/>
-        </p:nvSpPr>
-        <p:spPr>
-          <a:xfrm>
-            <a:off x="11597449" y="1195815"/>
-            <a:ext cx="177042" cy="177042"/>
-          </a:xfrm>
-          <a:prstGeom prst="ellipse">
-            <a:avLst/>
-          </a:prstGeom>
-          <a:solidFill>
-            <a:srgbClr val="8C56B3"/>
-          </a:solidFill>
-          <a:ln>
-            <a:noFill/>
-          </a:ln>
-        </p:spPr>
-        <p:txBody>
-          <a:bodyPr rtlCol="0" anchor="ctr"/>
-          <a:lstStyle/>
-          <a:p>
-            <a:pPr algn="ctr"/>
-          </a:p>
-        </p:txBody>
-      </p:sp>
-      <p:sp>
-        <p:nvSpPr>
-          <p:cNvPr id="12" name="장식"/>
-          <p:cNvSpPr/>
-          <p:nvPr/>
-        </p:nvSpPr>
-        <p:spPr>
-          <a:xfrm>
-            <a:off x="11309508" y="479409"/>
-            <a:ext cx="170008" cy="170008"/>
-          </a:xfrm>
-          <a:prstGeom prst="ellipse">
-            <a:avLst/>
-          </a:prstGeom>
-          <a:solidFill>
-            <a:srgbClr val="E3D3EE"/>
-          </a:solidFill>
-          <a:ln>
-            <a:noFill/>
-          </a:ln>
-        </p:spPr>
-        <p:txBody>
-          <a:bodyPr rtlCol="0" anchor="ctr"/>
-          <a:lstStyle/>
-          <a:p>
-            <a:pPr algn="ctr"/>
-          </a:p>
-        </p:txBody>
-      </p:sp>
-      <p:sp>
-        <p:nvSpPr>
-          <p:cNvPr id="13" name="장식"/>
-          <p:cNvSpPr/>
-          <p:nvPr/>
-        </p:nvSpPr>
-        <p:spPr>
-          <a:xfrm>
-            <a:off x="11092695" y="457650"/>
-            <a:ext cx="173296" cy="173296"/>
-          </a:xfrm>
-          <a:prstGeom prst="ellipse">
-            <a:avLst/>
-          </a:prstGeom>
-          <a:solidFill>
-            <a:srgbClr val="868D3F"/>
-          </a:solidFill>
-          <a:ln>
-            <a:noFill/>
-          </a:ln>
-        </p:spPr>
-        <p:txBody>
-          <a:bodyPr rtlCol="0" anchor="ctr"/>
-          <a:lstStyle/>
-          <a:p>
-            <a:pPr algn="ctr"/>
-          </a:p>
-        </p:txBody>
-      </p:sp>
-      <p:sp>
-        <p:nvSpPr>
-          <p:cNvPr id="14" name="장식"/>
-          <p:cNvSpPr/>
-          <p:nvPr/>
-        </p:nvSpPr>
-        <p:spPr>
-          <a:xfrm>
-            <a:off x="10802743" y="209851"/>
-            <a:ext cx="141496" cy="141496"/>
-          </a:xfrm>
-          <a:prstGeom prst="ellipse">
-            <a:avLst/>
-          </a:prstGeom>
-          <a:solidFill>
-            <a:srgbClr val="8C56B3"/>
-          </a:solidFill>
-          <a:ln>
-            <a:noFill/>
-          </a:ln>
-        </p:spPr>
-        <p:txBody>
-          <a:bodyPr rtlCol="0" anchor="ctr"/>
-          <a:lstStyle/>
-          <a:p>
-            <a:pPr algn="ctr"/>
-          </a:p>
-        </p:txBody>
-      </p:sp>
-      <p:sp>
-        <p:nvSpPr>
-          <p:cNvPr id="15" name="장식"/>
-          <p:cNvSpPr/>
-          <p:nvPr/>
-        </p:nvSpPr>
-        <p:spPr>
-          <a:xfrm>
-            <a:off x="11602587" y="1201606"/>
-            <a:ext cx="84341" cy="84341"/>
-          </a:xfrm>
-          <a:prstGeom prst="ellipse">
-            <a:avLst/>
-          </a:prstGeom>
-          <a:solidFill>
-            <a:srgbClr val="E3D3EE"/>
-          </a:solidFill>
-          <a:ln>
-            <a:noFill/>
-          </a:ln>
-        </p:spPr>
-        <p:txBody>
-          <a:bodyPr rtlCol="0" anchor="ctr"/>
-          <a:lstStyle/>
-          <a:p>
-            <a:pPr algn="ctr"/>
-          </a:p>
-        </p:txBody>
-      </p:sp>
-      <p:sp>
-        <p:nvSpPr>
           <p:cNvPr id="2" name="Title 1"/>
           <p:cNvSpPr>
             <a:spLocks noGrp="1"/>
@@ -6537,7 +4900,7 @@
       </p:sp>
       <p:sp>
         <p:nvSpPr>
-          <p:cNvPr id="16" name="사진 자리"/>
+          <p:cNvPr id="5" name="사진 자리"/>
           <p:cNvSpPr/>
           <p:nvPr/>
         </p:nvSpPr>
@@ -6585,7 +4948,7 @@
       </p:sp>
       <p:sp>
         <p:nvSpPr>
-          <p:cNvPr id="17" name="사진 자리"/>
+          <p:cNvPr id="6" name="사진 자리"/>
           <p:cNvSpPr/>
           <p:nvPr/>
         </p:nvSpPr>
@@ -6633,7 +4996,7 @@
       </p:sp>
       <p:sp>
         <p:nvSpPr>
-          <p:cNvPr id="18" name="사진 자리"/>
+          <p:cNvPr id="7" name="사진 자리"/>
           <p:cNvSpPr/>
           <p:nvPr/>
         </p:nvSpPr>
@@ -6681,7 +5044,7 @@
       </p:sp>
       <p:sp>
         <p:nvSpPr>
-          <p:cNvPr id="19" name="사진 자리"/>
+          <p:cNvPr id="8" name="사진 자리"/>
           <p:cNvSpPr/>
           <p:nvPr/>
         </p:nvSpPr>
@@ -6729,7 +5092,7 @@
       </p:sp>
       <p:sp>
         <p:nvSpPr>
-          <p:cNvPr id="20" name="사진 자리"/>
+          <p:cNvPr id="9" name="사진 자리"/>
           <p:cNvSpPr/>
           <p:nvPr/>
         </p:nvSpPr>
@@ -6777,7 +5140,7 @@
       </p:sp>
       <p:sp>
         <p:nvSpPr>
-          <p:cNvPr id="21" name="사진 자리"/>
+          <p:cNvPr id="10" name="사진 자리"/>
           <p:cNvSpPr/>
           <p:nvPr/>
         </p:nvSpPr>
@@ -6834,14 +5197,6 @@
 <file path=ppt/slides/slide6.xml><?xml version="1.0" encoding="utf-8"?>
 <p:sld xmlns:a="http://schemas.openxmlformats.org/drawingml/2006/main" xmlns:p="http://schemas.openxmlformats.org/presentationml/2006/main" xmlns:r="http://schemas.openxmlformats.org/officeDocument/2006/relationships">
   <p:cSld>
-    <p:bg>
-      <p:bgPr>
-        <a:solidFill>
-          <a:srgbClr val="FFFFFF"/>
-        </a:solidFill>
-        <a:effectLst/>
-      </p:bgPr>
-    </p:bg>
     <p:spTree>
       <p:nvGrpSpPr>
         <p:cNvPr id="1" name=""/>
@@ -6849,383 +5204,30 @@
         <p:nvPr/>
       </p:nvGrpSpPr>
       <p:grpSpPr/>
-      <p:sp>
-        <p:nvSpPr>
-          <p:cNvPr id="3" name="장식"/>
-          <p:cNvSpPr/>
+      <p:pic>
+        <p:nvPicPr>
+          <p:cNvPr id="3" name="표지 그림" descr="wedding-11.jpg"/>
+          <p:cNvPicPr>
+            <a:picLocks noChangeAspect="1"/>
+          </p:cNvPicPr>
           <p:nvPr/>
-        </p:nvSpPr>
-        <p:spPr>
-          <a:xfrm>
-            <a:off x="7071183" y="-1714500"/>
-            <a:ext cx="7886700" cy="7886700"/>
-          </a:xfrm>
-          <a:prstGeom prst="ellipse">
+        </p:nvPicPr>
+        <p:blipFill>
+          <a:blip r:embed="rId2"/>
+          <a:stretch>
+            <a:fillRect/>
+          </a:stretch>
+        </p:blipFill>
+        <p:spPr>
+          <a:xfrm>
+            <a:off x="0" y="0"/>
+            <a:ext cx="12191695" cy="6858000"/>
+          </a:xfrm>
+          <a:prstGeom prst="rect">
             <a:avLst/>
           </a:prstGeom>
-          <a:solidFill>
-            <a:srgbClr val="E3D3EE"/>
-          </a:solidFill>
-          <a:ln>
-            <a:noFill/>
-          </a:ln>
-        </p:spPr>
-        <p:txBody>
-          <a:bodyPr rtlCol="0" anchor="ctr"/>
-          <a:lstStyle/>
-          <a:p>
-            <a:pPr algn="ctr"/>
-          </a:p>
-        </p:txBody>
-      </p:sp>
-      <p:sp>
-        <p:nvSpPr>
-          <p:cNvPr id="4" name="장식"/>
-          <p:cNvSpPr/>
-          <p:nvPr/>
-        </p:nvSpPr>
-        <p:spPr>
-          <a:xfrm>
-            <a:off x="9509522" y="3977639"/>
-            <a:ext cx="3429000" cy="3429000"/>
-          </a:xfrm>
-          <a:prstGeom prst="ellipse">
-            <a:avLst/>
-          </a:prstGeom>
-          <a:solidFill>
-            <a:srgbClr val="8C56B3"/>
-          </a:solidFill>
-          <a:ln>
-            <a:noFill/>
-          </a:ln>
-        </p:spPr>
-        <p:txBody>
-          <a:bodyPr rtlCol="0" anchor="ctr"/>
-          <a:lstStyle/>
-          <a:p>
-            <a:pPr algn="ctr"/>
-          </a:p>
-        </p:txBody>
-      </p:sp>
-      <p:sp>
-        <p:nvSpPr>
-          <p:cNvPr id="5" name="장식"/>
-          <p:cNvSpPr/>
-          <p:nvPr/>
-        </p:nvSpPr>
-        <p:spPr>
-          <a:xfrm>
-            <a:off x="8548094" y="665468"/>
-            <a:ext cx="439711" cy="439711"/>
-          </a:xfrm>
-          <a:prstGeom prst="ellipse">
-            <a:avLst/>
-          </a:prstGeom>
-          <a:solidFill>
-            <a:srgbClr val="8C56B3"/>
-          </a:solidFill>
-          <a:ln>
-            <a:noFill/>
-          </a:ln>
-        </p:spPr>
-        <p:txBody>
-          <a:bodyPr rtlCol="0" anchor="ctr"/>
-          <a:lstStyle/>
-          <a:p>
-            <a:pPr algn="ctr"/>
-          </a:p>
-        </p:txBody>
-      </p:sp>
-      <p:sp>
-        <p:nvSpPr>
-          <p:cNvPr id="6" name="장식"/>
-          <p:cNvSpPr/>
-          <p:nvPr/>
-        </p:nvSpPr>
-        <p:spPr>
-          <a:xfrm>
-            <a:off x="9870174" y="2648211"/>
-            <a:ext cx="325546" cy="325546"/>
-          </a:xfrm>
-          <a:prstGeom prst="ellipse">
-            <a:avLst/>
-          </a:prstGeom>
-          <a:solidFill>
-            <a:srgbClr val="E3D3EE"/>
-          </a:solidFill>
-          <a:ln>
-            <a:noFill/>
-          </a:ln>
-        </p:spPr>
-        <p:txBody>
-          <a:bodyPr rtlCol="0" anchor="ctr"/>
-          <a:lstStyle/>
-          <a:p>
-            <a:pPr algn="ctr"/>
-          </a:p>
-        </p:txBody>
-      </p:sp>
-      <p:sp>
-        <p:nvSpPr>
-          <p:cNvPr id="7" name="장식"/>
-          <p:cNvSpPr/>
-          <p:nvPr/>
-        </p:nvSpPr>
-        <p:spPr>
-          <a:xfrm>
-            <a:off x="10456902" y="844189"/>
-            <a:ext cx="428847" cy="428847"/>
-          </a:xfrm>
-          <a:prstGeom prst="ellipse">
-            <a:avLst/>
-          </a:prstGeom>
-          <a:solidFill>
-            <a:srgbClr val="868D3F"/>
-          </a:solidFill>
-          <a:ln>
-            <a:noFill/>
-          </a:ln>
-        </p:spPr>
-        <p:txBody>
-          <a:bodyPr rtlCol="0" anchor="ctr"/>
-          <a:lstStyle/>
-          <a:p>
-            <a:pPr algn="ctr"/>
-          </a:p>
-        </p:txBody>
-      </p:sp>
-      <p:sp>
-        <p:nvSpPr>
-          <p:cNvPr id="8" name="장식"/>
-          <p:cNvSpPr/>
-          <p:nvPr/>
-        </p:nvSpPr>
-        <p:spPr>
-          <a:xfrm>
-            <a:off x="10327883" y="2558810"/>
-            <a:ext cx="383917" cy="383917"/>
-          </a:xfrm>
-          <a:prstGeom prst="ellipse">
-            <a:avLst/>
-          </a:prstGeom>
-          <a:solidFill>
-            <a:srgbClr val="8C56B3"/>
-          </a:solidFill>
-          <a:ln>
-            <a:noFill/>
-          </a:ln>
-        </p:spPr>
-        <p:txBody>
-          <a:bodyPr rtlCol="0" anchor="ctr"/>
-          <a:lstStyle/>
-          <a:p>
-            <a:pPr algn="ctr"/>
-          </a:p>
-        </p:txBody>
-      </p:sp>
-      <p:sp>
-        <p:nvSpPr>
-          <p:cNvPr id="9" name="장식"/>
-          <p:cNvSpPr/>
-          <p:nvPr/>
-        </p:nvSpPr>
-        <p:spPr>
-          <a:xfrm>
-            <a:off x="8985224" y="371263"/>
-            <a:ext cx="271256" cy="271256"/>
-          </a:xfrm>
-          <a:prstGeom prst="ellipse">
-            <a:avLst/>
-          </a:prstGeom>
-          <a:solidFill>
-            <a:srgbClr val="E3D3EE"/>
-          </a:solidFill>
-          <a:ln>
-            <a:noFill/>
-          </a:ln>
-        </p:spPr>
-        <p:txBody>
-          <a:bodyPr rtlCol="0" anchor="ctr"/>
-          <a:lstStyle/>
-          <a:p>
-            <a:pPr algn="ctr"/>
-          </a:p>
-        </p:txBody>
-      </p:sp>
-      <p:sp>
-        <p:nvSpPr>
-          <p:cNvPr id="10" name="장식"/>
-          <p:cNvSpPr/>
-          <p:nvPr/>
-        </p:nvSpPr>
-        <p:spPr>
-          <a:xfrm>
-            <a:off x="10054636" y="427995"/>
-            <a:ext cx="294091" cy="294091"/>
-          </a:xfrm>
-          <a:prstGeom prst="ellipse">
-            <a:avLst/>
-          </a:prstGeom>
-          <a:solidFill>
-            <a:srgbClr val="868D3F"/>
-          </a:solidFill>
-          <a:ln>
-            <a:noFill/>
-          </a:ln>
-        </p:spPr>
-        <p:txBody>
-          <a:bodyPr rtlCol="0" anchor="ctr"/>
-          <a:lstStyle/>
-          <a:p>
-            <a:pPr algn="ctr"/>
-          </a:p>
-        </p:txBody>
-      </p:sp>
-      <p:sp>
-        <p:nvSpPr>
-          <p:cNvPr id="11" name="장식"/>
-          <p:cNvSpPr/>
-          <p:nvPr/>
-        </p:nvSpPr>
-        <p:spPr>
-          <a:xfrm>
-            <a:off x="10539235" y="2844566"/>
-            <a:ext cx="506986" cy="506986"/>
-          </a:xfrm>
-          <a:prstGeom prst="ellipse">
-            <a:avLst/>
-          </a:prstGeom>
-          <a:solidFill>
-            <a:srgbClr val="8C56B3"/>
-          </a:solidFill>
-          <a:ln>
-            <a:noFill/>
-          </a:ln>
-        </p:spPr>
-        <p:txBody>
-          <a:bodyPr rtlCol="0" anchor="ctr"/>
-          <a:lstStyle/>
-          <a:p>
-            <a:pPr algn="ctr"/>
-          </a:p>
-        </p:txBody>
-      </p:sp>
-      <p:sp>
-        <p:nvSpPr>
-          <p:cNvPr id="12" name="장식"/>
-          <p:cNvSpPr/>
-          <p:nvPr/>
-        </p:nvSpPr>
-        <p:spPr>
-          <a:xfrm>
-            <a:off x="9714677" y="793042"/>
-            <a:ext cx="486841" cy="486841"/>
-          </a:xfrm>
-          <a:prstGeom prst="ellipse">
-            <a:avLst/>
-          </a:prstGeom>
-          <a:solidFill>
-            <a:srgbClr val="E3D3EE"/>
-          </a:solidFill>
-          <a:ln>
-            <a:noFill/>
-          </a:ln>
-        </p:spPr>
-        <p:txBody>
-          <a:bodyPr rtlCol="0" anchor="ctr"/>
-          <a:lstStyle/>
-          <a:p>
-            <a:pPr algn="ctr"/>
-          </a:p>
-        </p:txBody>
-      </p:sp>
-      <p:sp>
-        <p:nvSpPr>
-          <p:cNvPr id="13" name="장식"/>
-          <p:cNvSpPr/>
-          <p:nvPr/>
-        </p:nvSpPr>
-        <p:spPr>
-          <a:xfrm>
-            <a:off x="9093804" y="730731"/>
-            <a:ext cx="496258" cy="496258"/>
-          </a:xfrm>
-          <a:prstGeom prst="ellipse">
-            <a:avLst/>
-          </a:prstGeom>
-          <a:solidFill>
-            <a:srgbClr val="868D3F"/>
-          </a:solidFill>
-          <a:ln>
-            <a:noFill/>
-          </a:ln>
-        </p:spPr>
-        <p:txBody>
-          <a:bodyPr rtlCol="0" anchor="ctr"/>
-          <a:lstStyle/>
-          <a:p>
-            <a:pPr algn="ctr"/>
-          </a:p>
-        </p:txBody>
-      </p:sp>
-      <p:sp>
-        <p:nvSpPr>
-          <p:cNvPr id="14" name="장식"/>
-          <p:cNvSpPr/>
-          <p:nvPr/>
-        </p:nvSpPr>
-        <p:spPr>
-          <a:xfrm>
-            <a:off x="8263488" y="21126"/>
-            <a:ext cx="405194" cy="405194"/>
-          </a:xfrm>
-          <a:prstGeom prst="ellipse">
-            <a:avLst/>
-          </a:prstGeom>
-          <a:solidFill>
-            <a:srgbClr val="8C56B3"/>
-          </a:solidFill>
-          <a:ln>
-            <a:noFill/>
-          </a:ln>
-        </p:spPr>
-        <p:txBody>
-          <a:bodyPr rtlCol="0" anchor="ctr"/>
-          <a:lstStyle/>
-          <a:p>
-            <a:pPr algn="ctr"/>
-          </a:p>
-        </p:txBody>
-      </p:sp>
-      <p:sp>
-        <p:nvSpPr>
-          <p:cNvPr id="15" name="장식"/>
-          <p:cNvSpPr/>
-          <p:nvPr/>
-        </p:nvSpPr>
-        <p:spPr>
-          <a:xfrm>
-            <a:off x="10553950" y="2861152"/>
-            <a:ext cx="241523" cy="241523"/>
-          </a:xfrm>
-          <a:prstGeom prst="ellipse">
-            <a:avLst/>
-          </a:prstGeom>
-          <a:solidFill>
-            <a:srgbClr val="E3D3EE"/>
-          </a:solidFill>
-          <a:ln>
-            <a:noFill/>
-          </a:ln>
-        </p:spPr>
-        <p:txBody>
-          <a:bodyPr rtlCol="0" anchor="ctr"/>
-          <a:lstStyle/>
-          <a:p>
-            <a:pPr algn="ctr"/>
-          </a:p>
-        </p:txBody>
-      </p:sp>
+        </p:spPr>
+      </p:pic>
       <p:sp>
         <p:nvSpPr>
           <p:cNvPr id="2" name="Title 1"/>
@@ -7239,7 +5241,7 @@
         <p:spPr>
           <a:xfrm>
             <a:off x="853418" y="2057400"/>
-            <a:ext cx="6705432" cy="1463040"/>
+            <a:ext cx="6095847" cy="1554480"/>
           </a:xfrm>
         </p:spPr>
         <p:txBody>
@@ -7259,20 +5261,20 @@
                   <a:srgbClr val="573371"/>
                 </a:solidFill>
               </a:rPr>
-              <a:t>함께해 주셔서 감사합니다</a:t>
-            </a:r>
-          </a:p>
-        </p:txBody>
-      </p:sp>
-      <p:sp>
-        <p:nvSpPr>
-          <p:cNvPr id="16" name="한 줄 문구"/>
+              <a:t>와 주셔서 고맙습니다</a:t>
+            </a:r>
+          </a:p>
+        </p:txBody>
+      </p:sp>
+      <p:sp>
+        <p:nvSpPr>
+          <p:cNvPr id="4" name="한 줄 문구"/>
           <p:cNvSpPr txBox="1"/>
           <p:nvPr/>
         </p:nvSpPr>
         <p:spPr>
           <a:xfrm>
-            <a:off x="853418" y="3611880"/>
+            <a:off x="853418" y="3749039"/>
             <a:ext cx="6095847" cy="822960"/>
           </a:xfrm>
           <a:prstGeom prst="rect">
@@ -7297,20 +5299,20 @@
                   <a:srgbClr val="573371"/>
                 </a:solidFill>
               </a:rPr>
-              <a:t>오늘의 축복을 오래도록 간직하겠습니다</a:t>
-            </a:r>
-          </a:p>
-        </p:txBody>
-      </p:sp>
-      <p:sp>
-        <p:nvSpPr>
-          <p:cNvPr id="17" name="안내 문구"/>
+              <a:t>잘 살겠습니다</a:t>
+            </a:r>
+          </a:p>
+        </p:txBody>
+      </p:sp>
+      <p:sp>
+        <p:nvSpPr>
+          <p:cNvPr id="5" name="안내 문구"/>
           <p:cNvSpPr txBox="1"/>
           <p:nvPr/>
         </p:nvSpPr>
         <p:spPr>
           <a:xfrm>
-            <a:off x="853418" y="4480560"/>
+            <a:off x="853418" y="4617720"/>
             <a:ext cx="6095847" cy="914400"/>
           </a:xfrm>
           <a:prstGeom prst="rect">

--- a/public/fun/pack/pptx/wedding/결혼식_11_소개중심_라일락골목.pptx
+++ b/public/fun/pack/pptx/wedding/결혼식_11_소개중심_라일락골목.pptx
@@ -3347,7 +3347,7 @@
             <a:r>
               <a:rPr sz="3600" b="1" i="0">
                 <a:solidFill>
-                  <a:srgbClr val="573371"/>
+                  <a:srgbClr val="4E226D"/>
                 </a:solidFill>
               </a:rPr>
               <a:t>저희 결혼합니다</a:t>
@@ -3385,7 +3385,7 @@
             <a:r>
               <a:rPr sz="1700" b="0" i="1">
                 <a:solidFill>
-                  <a:srgbClr val="573371"/>
+                  <a:srgbClr val="4E226D"/>
                 </a:solidFill>
               </a:rPr>
               <a:t>오래 만난 사이, 이제 같이 삽니다</a:t>
@@ -3487,7 +3487,7 @@
             <a:avLst/>
           </a:prstGeom>
           <a:solidFill>
-            <a:srgbClr val="E3D3EE"/>
+            <a:srgbClr val="E8D4F7"/>
           </a:solidFill>
           <a:ln>
             <a:noFill/>
@@ -3516,7 +3516,7 @@
             <a:avLst/>
           </a:prstGeom>
           <a:solidFill>
-            <a:srgbClr val="8C56B3"/>
+            <a:srgbClr val="9651C8"/>
           </a:solidFill>
           <a:ln>
             <a:noFill/>
@@ -3560,7 +3560,7 @@
             <a:r>
               <a:rPr sz="3000" b="1" i="0">
                 <a:solidFill>
-                  <a:srgbClr val="573371"/>
+                  <a:srgbClr val="4E226D"/>
                 </a:solidFill>
               </a:rPr>
               <a:t>신랑 · 신부 소개</a:t>
@@ -3583,11 +3583,11 @@
             <a:avLst/>
           </a:prstGeom>
           <a:solidFill>
-            <a:srgbClr val="E3D3EE"/>
+            <a:srgbClr val="E8D4F7"/>
           </a:solidFill>
           <a:ln w="19050">
             <a:solidFill>
-              <a:srgbClr val="8C56B3"/>
+              <a:srgbClr val="9651C8"/>
             </a:solidFill>
             <a:prstDash val="dash"/>
           </a:ln>
@@ -3606,7 +3606,7 @@
             <a:r>
               <a:rPr sz="1200" b="0" i="0">
                 <a:solidFill>
-                  <a:srgbClr val="573371"/>
+                  <a:srgbClr val="4E226D"/>
                 </a:solidFill>
               </a:rPr>
               <a:t>사진</a:t>
@@ -3644,7 +3644,7 @@
             <a:r>
               <a:rPr sz="1600" b="1" i="0">
                 <a:solidFill>
-                  <a:srgbClr val="573371"/>
+                  <a:srgbClr val="4E226D"/>
                 </a:solidFill>
               </a:rPr>
               <a:t>신랑</a:t>
@@ -3735,11 +3735,11 @@
             <a:avLst/>
           </a:prstGeom>
           <a:solidFill>
-            <a:srgbClr val="E3D3EE"/>
+            <a:srgbClr val="E8D4F7"/>
           </a:solidFill>
           <a:ln w="19050">
             <a:solidFill>
-              <a:srgbClr val="8C56B3"/>
+              <a:srgbClr val="9651C8"/>
             </a:solidFill>
             <a:prstDash val="dash"/>
           </a:ln>
@@ -3758,7 +3758,7 @@
             <a:r>
               <a:rPr sz="1200" b="0" i="0">
                 <a:solidFill>
-                  <a:srgbClr val="573371"/>
+                  <a:srgbClr val="4E226D"/>
                 </a:solidFill>
               </a:rPr>
               <a:t>사진</a:t>
@@ -3796,7 +3796,7 @@
             <a:r>
               <a:rPr sz="1600" b="1" i="0">
                 <a:solidFill>
-                  <a:srgbClr val="573371"/>
+                  <a:srgbClr val="4E226D"/>
                 </a:solidFill>
               </a:rPr>
               <a:t>신부</a:t>
@@ -3913,7 +3913,7 @@
             <a:avLst/>
           </a:prstGeom>
           <a:solidFill>
-            <a:srgbClr val="E3D3EE"/>
+            <a:srgbClr val="E8D4F7"/>
           </a:solidFill>
           <a:ln>
             <a:noFill/>
@@ -3942,7 +3942,7 @@
             <a:avLst/>
           </a:prstGeom>
           <a:solidFill>
-            <a:srgbClr val="8C56B3"/>
+            <a:srgbClr val="9651C8"/>
           </a:solidFill>
           <a:ln>
             <a:noFill/>
@@ -3986,7 +3986,7 @@
             <a:r>
               <a:rPr sz="3000" b="1" i="0">
                 <a:solidFill>
-                  <a:srgbClr val="573371"/>
+                  <a:srgbClr val="4E226D"/>
                 </a:solidFill>
               </a:rPr>
               <a:t>우리 두 사람</a:t>
@@ -4011,11 +4011,11 @@
             </a:avLst>
           </a:prstGeom>
           <a:solidFill>
-            <a:srgbClr val="F5F1F9"/>
+            <a:srgbClr val="F8F3FC"/>
           </a:solidFill>
           <a:ln w="12700">
             <a:solidFill>
-              <a:srgbClr val="E3D3EE"/>
+              <a:srgbClr val="E8D4F7"/>
             </a:solidFill>
           </a:ln>
         </p:spPr>
@@ -4044,7 +4044,7 @@
             </a:avLst>
           </a:prstGeom>
           <a:solidFill>
-            <a:srgbClr val="8C56B3"/>
+            <a:srgbClr val="9651C8"/>
           </a:solidFill>
           <a:ln>
             <a:noFill/>
@@ -4196,11 +4196,11 @@
             </a:avLst>
           </a:prstGeom>
           <a:solidFill>
-            <a:srgbClr val="E3D3EE"/>
+            <a:srgbClr val="E8D4F7"/>
           </a:solidFill>
           <a:ln w="12700">
             <a:solidFill>
-              <a:srgbClr val="E3D3EE"/>
+              <a:srgbClr val="E8D4F7"/>
             </a:solidFill>
           </a:ln>
         </p:spPr>
@@ -4229,7 +4229,7 @@
             </a:avLst>
           </a:prstGeom>
           <a:solidFill>
-            <a:srgbClr val="573371"/>
+            <a:srgbClr val="4E226D"/>
           </a:solidFill>
           <a:ln>
             <a:noFill/>
@@ -4405,7 +4405,7 @@
             <a:avLst/>
           </a:prstGeom>
           <a:solidFill>
-            <a:srgbClr val="E3D3EE"/>
+            <a:srgbClr val="E8D4F7"/>
           </a:solidFill>
           <a:ln>
             <a:noFill/>
@@ -4434,7 +4434,7 @@
             <a:avLst/>
           </a:prstGeom>
           <a:solidFill>
-            <a:srgbClr val="8C56B3"/>
+            <a:srgbClr val="9651C8"/>
           </a:solidFill>
           <a:ln>
             <a:noFill/>
@@ -4478,7 +4478,7 @@
             <a:r>
               <a:rPr sz="3000" b="1" i="0">
                 <a:solidFill>
-                  <a:srgbClr val="573371"/>
+                  <a:srgbClr val="4E226D"/>
                 </a:solidFill>
               </a:rPr>
               <a:t>서로에게 하고 싶은 말</a:t>
@@ -4503,11 +4503,11 @@
             </a:avLst>
           </a:prstGeom>
           <a:solidFill>
-            <a:srgbClr val="F5F1F9"/>
+            <a:srgbClr val="F8F3FC"/>
           </a:solidFill>
           <a:ln w="12700">
             <a:solidFill>
-              <a:srgbClr val="E3D3EE"/>
+              <a:srgbClr val="E8D4F7"/>
             </a:solidFill>
           </a:ln>
         </p:spPr>
@@ -4536,7 +4536,7 @@
             </a:avLst>
           </a:prstGeom>
           <a:solidFill>
-            <a:srgbClr val="8C56B3"/>
+            <a:srgbClr val="9651C8"/>
           </a:solidFill>
           <a:ln>
             <a:noFill/>
@@ -4648,11 +4648,11 @@
             </a:avLst>
           </a:prstGeom>
           <a:solidFill>
-            <a:srgbClr val="E3D3EE"/>
+            <a:srgbClr val="E8D4F7"/>
           </a:solidFill>
           <a:ln w="12700">
             <a:solidFill>
-              <a:srgbClr val="E3D3EE"/>
+              <a:srgbClr val="E8D4F7"/>
             </a:solidFill>
           </a:ln>
         </p:spPr>
@@ -4681,7 +4681,7 @@
             </a:avLst>
           </a:prstGeom>
           <a:solidFill>
-            <a:srgbClr val="573371"/>
+            <a:srgbClr val="4E226D"/>
           </a:solidFill>
           <a:ln>
             <a:noFill/>
@@ -4817,7 +4817,7 @@
             <a:avLst/>
           </a:prstGeom>
           <a:solidFill>
-            <a:srgbClr val="E3D3EE"/>
+            <a:srgbClr val="E8D4F7"/>
           </a:solidFill>
           <a:ln>
             <a:noFill/>
@@ -4846,7 +4846,7 @@
             <a:avLst/>
           </a:prstGeom>
           <a:solidFill>
-            <a:srgbClr val="8C56B3"/>
+            <a:srgbClr val="9651C8"/>
           </a:solidFill>
           <a:ln>
             <a:noFill/>
@@ -4890,7 +4890,7 @@
             <a:r>
               <a:rPr sz="3000" b="1" i="0">
                 <a:solidFill>
-                  <a:srgbClr val="573371"/>
+                  <a:srgbClr val="4E226D"/>
                 </a:solidFill>
               </a:rPr>
               <a:t>웨딩 사진</a:t>
@@ -4915,11 +4915,11 @@
             </a:avLst>
           </a:prstGeom>
           <a:solidFill>
-            <a:srgbClr val="E3D3EE"/>
+            <a:srgbClr val="E8D4F7"/>
           </a:solidFill>
           <a:ln w="19050">
             <a:solidFill>
-              <a:srgbClr val="8C56B3"/>
+              <a:srgbClr val="9651C8"/>
             </a:solidFill>
             <a:prstDash val="dash"/>
           </a:ln>
@@ -4938,7 +4938,7 @@
             <a:r>
               <a:rPr sz="1200" b="0" i="0">
                 <a:solidFill>
-                  <a:srgbClr val="573371"/>
+                  <a:srgbClr val="4E226D"/>
                 </a:solidFill>
               </a:rPr>
               <a:t>사진 1</a:t>
@@ -4963,11 +4963,11 @@
             </a:avLst>
           </a:prstGeom>
           <a:solidFill>
-            <a:srgbClr val="E3D3EE"/>
+            <a:srgbClr val="E8D4F7"/>
           </a:solidFill>
           <a:ln w="19050">
             <a:solidFill>
-              <a:srgbClr val="8C56B3"/>
+              <a:srgbClr val="9651C8"/>
             </a:solidFill>
             <a:prstDash val="dash"/>
           </a:ln>
@@ -4986,7 +4986,7 @@
             <a:r>
               <a:rPr sz="1200" b="0" i="0">
                 <a:solidFill>
-                  <a:srgbClr val="573371"/>
+                  <a:srgbClr val="4E226D"/>
                 </a:solidFill>
               </a:rPr>
               <a:t>사진 2</a:t>
@@ -5011,11 +5011,11 @@
             </a:avLst>
           </a:prstGeom>
           <a:solidFill>
-            <a:srgbClr val="E3D3EE"/>
+            <a:srgbClr val="E8D4F7"/>
           </a:solidFill>
           <a:ln w="19050">
             <a:solidFill>
-              <a:srgbClr val="8C56B3"/>
+              <a:srgbClr val="9651C8"/>
             </a:solidFill>
             <a:prstDash val="dash"/>
           </a:ln>
@@ -5034,7 +5034,7 @@
             <a:r>
               <a:rPr sz="1200" b="0" i="0">
                 <a:solidFill>
-                  <a:srgbClr val="573371"/>
+                  <a:srgbClr val="4E226D"/>
                 </a:solidFill>
               </a:rPr>
               <a:t>사진 3</a:t>
@@ -5059,11 +5059,11 @@
             </a:avLst>
           </a:prstGeom>
           <a:solidFill>
-            <a:srgbClr val="E3D3EE"/>
+            <a:srgbClr val="E8D4F7"/>
           </a:solidFill>
           <a:ln w="19050">
             <a:solidFill>
-              <a:srgbClr val="8C56B3"/>
+              <a:srgbClr val="9651C8"/>
             </a:solidFill>
             <a:prstDash val="dash"/>
           </a:ln>
@@ -5082,7 +5082,7 @@
             <a:r>
               <a:rPr sz="1200" b="0" i="0">
                 <a:solidFill>
-                  <a:srgbClr val="573371"/>
+                  <a:srgbClr val="4E226D"/>
                 </a:solidFill>
               </a:rPr>
               <a:t>사진 4</a:t>
@@ -5107,11 +5107,11 @@
             </a:avLst>
           </a:prstGeom>
           <a:solidFill>
-            <a:srgbClr val="E3D3EE"/>
+            <a:srgbClr val="E8D4F7"/>
           </a:solidFill>
           <a:ln w="19050">
             <a:solidFill>
-              <a:srgbClr val="8C56B3"/>
+              <a:srgbClr val="9651C8"/>
             </a:solidFill>
             <a:prstDash val="dash"/>
           </a:ln>
@@ -5130,7 +5130,7 @@
             <a:r>
               <a:rPr sz="1200" b="0" i="0">
                 <a:solidFill>
-                  <a:srgbClr val="573371"/>
+                  <a:srgbClr val="4E226D"/>
                 </a:solidFill>
               </a:rPr>
               <a:t>사진 5</a:t>
@@ -5155,11 +5155,11 @@
             </a:avLst>
           </a:prstGeom>
           <a:solidFill>
-            <a:srgbClr val="E3D3EE"/>
+            <a:srgbClr val="E8D4F7"/>
           </a:solidFill>
           <a:ln w="19050">
             <a:solidFill>
-              <a:srgbClr val="8C56B3"/>
+              <a:srgbClr val="9651C8"/>
             </a:solidFill>
             <a:prstDash val="dash"/>
           </a:ln>
@@ -5178,7 +5178,7 @@
             <a:r>
               <a:rPr sz="1200" b="0" i="0">
                 <a:solidFill>
-                  <a:srgbClr val="573371"/>
+                  <a:srgbClr val="4E226D"/>
                 </a:solidFill>
               </a:rPr>
               <a:t>사진 6</a:t>
@@ -5258,7 +5258,7 @@
             <a:r>
               <a:rPr sz="3400" b="1" i="0">
                 <a:solidFill>
-                  <a:srgbClr val="573371"/>
+                  <a:srgbClr val="4E226D"/>
                 </a:solidFill>
               </a:rPr>
               <a:t>와 주셔서 고맙습니다</a:t>
@@ -5296,7 +5296,7 @@
             <a:r>
               <a:rPr sz="1700" b="0" i="1">
                 <a:solidFill>
-                  <a:srgbClr val="573371"/>
+                  <a:srgbClr val="4E226D"/>
                 </a:solidFill>
               </a:rPr>
               <a:t>잘 살겠습니다</a:t>
@@ -5361,34 +5361,34 @@
         <a:sysClr val="window" lastClr="FFFFFF"/>
       </a:lt1>
       <a:dk2>
-        <a:srgbClr val="573371"/>
+        <a:srgbClr val="4E226D"/>
       </a:dk2>
       <a:lt2>
-        <a:srgbClr val="F5F1F9"/>
+        <a:srgbClr val="F8F3FC"/>
       </a:lt2>
       <a:accent1>
-        <a:srgbClr val="8C56B3"/>
+        <a:srgbClr val="9651C8"/>
       </a:accent1>
       <a:accent2>
-        <a:srgbClr val="868D3F"/>
+        <a:srgbClr val="339941"/>
       </a:accent2>
       <a:accent3>
-        <a:srgbClr val="573371"/>
+        <a:srgbClr val="4E226D"/>
       </a:accent3>
       <a:accent4>
-        <a:srgbClr val="E3D3EE"/>
+        <a:srgbClr val="E8D4F7"/>
       </a:accent4>
       <a:accent5>
-        <a:srgbClr val="897279"/>
+        <a:srgbClr val="647584"/>
       </a:accent5>
       <a:accent6>
-        <a:srgbClr val="9A85AA"/>
+        <a:srgbClr val="957AA7"/>
       </a:accent6>
       <a:hlink>
-        <a:srgbClr val="8C56B3"/>
+        <a:srgbClr val="9651C8"/>
       </a:hlink>
       <a:folHlink>
-        <a:srgbClr val="573371"/>
+        <a:srgbClr val="4E226D"/>
       </a:folHlink>
     </a:clrScheme>
     <a:fontScheme name="Office">

--- a/public/fun/pack/pptx/wedding/결혼식_11_소개중심_라일락골목.pptx
+++ b/public/fun/pack/pptx/wedding/결혼식_11_소개중심_라일락골목.pptx
@@ -3286,6 +3286,14 @@
 <file path=ppt/slides/slide1.xml><?xml version="1.0" encoding="utf-8"?>
 <p:sld xmlns:a="http://schemas.openxmlformats.org/drawingml/2006/main" xmlns:p="http://schemas.openxmlformats.org/presentationml/2006/main" xmlns:r="http://schemas.openxmlformats.org/officeDocument/2006/relationships">
   <p:cSld>
+    <p:bg>
+      <p:bgPr>
+        <a:solidFill>
+          <a:srgbClr val="F5EAFD"/>
+        </a:solidFill>
+        <a:effectLst/>
+      </p:bgPr>
+    </p:bg>
     <p:spTree>
       <p:nvGrpSpPr>
         <p:cNvPr id="1" name=""/>
@@ -3293,30 +3301,116 @@
         <p:nvPr/>
       </p:nvGrpSpPr>
       <p:grpSpPr/>
-      <p:pic>
-        <p:nvPicPr>
-          <p:cNvPr id="3" name="표지 그림" descr="wedding-11.jpg"/>
-          <p:cNvPicPr>
-            <a:picLocks noChangeAspect="1"/>
-          </p:cNvPicPr>
+      <p:sp>
+        <p:nvSpPr>
+          <p:cNvPr id="3" name="사진 자리"/>
+          <p:cNvSpPr/>
           <p:nvPr/>
-        </p:nvPicPr>
-        <p:blipFill>
-          <a:blip r:embed="rId2"/>
-          <a:stretch>
-            <a:fillRect/>
-          </a:stretch>
-        </p:blipFill>
+        </p:nvSpPr>
         <p:spPr>
           <a:xfrm>
             <a:off x="0" y="0"/>
-            <a:ext cx="12191695" cy="6858000"/>
+            <a:ext cx="4389010" cy="6858000"/>
           </a:xfrm>
           <a:prstGeom prst="rect">
             <a:avLst/>
           </a:prstGeom>
-        </p:spPr>
-      </p:pic>
+          <a:solidFill>
+            <a:srgbClr val="D2A6F2"/>
+          </a:solidFill>
+          <a:ln>
+            <a:noFill/>
+          </a:ln>
+        </p:spPr>
+        <p:txBody>
+          <a:bodyPr rtlCol="0" anchor="ctr" wrap="square" lIns="54864" rIns="54864" tIns="27432" bIns="27432">
+            <a:noAutofit/>
+          </a:bodyPr>
+          <a:lstStyle/>
+          <a:p>
+            <a:pPr algn="ctr">
+              <a:lnSpc>
+                <a:spcPct val="100000"/>
+              </a:lnSpc>
+            </a:pPr>
+            <a:r>
+              <a:rPr sz="1400" b="0" i="0">
+                <a:solidFill>
+                  <a:srgbClr val="3B2749"/>
+                </a:solidFill>
+              </a:rPr>
+              <a:t>사진을 넣어 주세요</a:t>
+            </a:r>
+          </a:p>
+        </p:txBody>
+      </p:sp>
+      <p:sp>
+        <p:nvSpPr>
+          <p:cNvPr id="4" name="장식"/>
+          <p:cNvSpPr/>
+          <p:nvPr/>
+        </p:nvSpPr>
+        <p:spPr>
+          <a:xfrm>
+            <a:off x="365750" y="365760"/>
+            <a:ext cx="3657508" cy="6126480"/>
+          </a:xfrm>
+          <a:prstGeom prst="rect">
+            <a:avLst/>
+          </a:prstGeom>
+          <a:noFill/>
+          <a:ln w="9525">
+            <a:solidFill>
+              <a:srgbClr val="26231F"/>
+            </a:solidFill>
+          </a:ln>
+        </p:spPr>
+        <p:txBody>
+          <a:bodyPr rtlCol="0" anchor="ctr"/>
+          <a:lstStyle/>
+          <a:p>
+            <a:pPr algn="ctr"/>
+          </a:p>
+        </p:txBody>
+      </p:sp>
+      <p:sp>
+        <p:nvSpPr>
+          <p:cNvPr id="5" name="라벨"/>
+          <p:cNvSpPr txBox="1"/>
+          <p:nvPr/>
+        </p:nvSpPr>
+        <p:spPr>
+          <a:xfrm>
+            <a:off x="6827349" y="2148840"/>
+            <a:ext cx="4632844" cy="274320"/>
+          </a:xfrm>
+          <a:prstGeom prst="rect">
+            <a:avLst/>
+          </a:prstGeom>
+          <a:noFill/>
+        </p:spPr>
+        <p:txBody>
+          <a:bodyPr wrap="square" lIns="54864" rIns="54864" tIns="27432" bIns="27432" anchor="t">
+            <a:noAutofit/>
+          </a:bodyPr>
+          <a:lstStyle/>
+          <a:p>
+            <a:pPr algn="l">
+              <a:lnSpc>
+                <a:spcPct val="115000"/>
+              </a:lnSpc>
+            </a:pPr>
+            <a:r>
+              <a:rPr sz="1000" b="1" i="0" spc="250">
+                <a:solidFill>
+                  <a:srgbClr val="26231F"/>
+                </a:solidFill>
+              </a:rPr>
+              <a:t>WEDDING</a:t>
+            </a:r>
+          </a:p>
+        </p:txBody>
+      </p:sp>
       <p:sp>
         <p:nvSpPr>
           <p:cNvPr id="2" name="Title 1"/>
@@ -3329,8 +3423,8 @@
         </p:nvSpPr>
         <p:spPr>
           <a:xfrm>
-            <a:off x="853418" y="2057400"/>
-            <a:ext cx="6095847" cy="1554480"/>
+            <a:off x="6827349" y="2606040"/>
+            <a:ext cx="4632844" cy="1188720"/>
           </a:xfrm>
         </p:spPr>
         <p:txBody>
@@ -3347,7 +3441,7 @@
             <a:r>
               <a:rPr sz="3600" b="1" i="0">
                 <a:solidFill>
-                  <a:srgbClr val="4E226D"/>
+                  <a:srgbClr val="26231F"/>
                 </a:solidFill>
               </a:rPr>
               <a:t>저희 결혼합니다</a:t>
@@ -3357,14 +3451,14 @@
       </p:sp>
       <p:sp>
         <p:nvSpPr>
-          <p:cNvPr id="4" name="한 줄 문구"/>
+          <p:cNvPr id="6" name="한 줄 문구"/>
           <p:cNvSpPr txBox="1"/>
           <p:nvPr/>
         </p:nvSpPr>
         <p:spPr>
           <a:xfrm>
-            <a:off x="853418" y="3749039"/>
-            <a:ext cx="6095847" cy="822960"/>
+            <a:off x="6827349" y="3886200"/>
+            <a:ext cx="4632844" cy="822960"/>
           </a:xfrm>
           <a:prstGeom prst="rect">
             <a:avLst/>
@@ -3383,9 +3477,9 @@
               </a:lnSpc>
             </a:pPr>
             <a:r>
-              <a:rPr sz="1700" b="0" i="1">
-                <a:solidFill>
-                  <a:srgbClr val="4E226D"/>
+              <a:rPr sz="1700" b="0" i="0">
+                <a:solidFill>
+                  <a:srgbClr val="26231F"/>
                 </a:solidFill>
               </a:rPr>
               <a:t>오래 만난 사이, 이제 같이 삽니다</a:t>
@@ -3395,14 +3489,14 @@
       </p:sp>
       <p:sp>
         <p:nvSpPr>
-          <p:cNvPr id="5" name="안내 문구"/>
+          <p:cNvPr id="7" name="안내 문구"/>
           <p:cNvSpPr txBox="1"/>
           <p:nvPr/>
         </p:nvSpPr>
         <p:spPr>
           <a:xfrm>
-            <a:off x="853418" y="4617720"/>
-            <a:ext cx="6095847" cy="914400"/>
+            <a:off x="6827349" y="4754880"/>
+            <a:ext cx="4632844" cy="914400"/>
           </a:xfrm>
           <a:prstGeom prst="rect">
             <a:avLst/>
@@ -3423,7 +3517,7 @@
             <a:r>
               <a:rPr sz="1400" b="0" i="0">
                 <a:solidFill>
-                  <a:srgbClr val="666666"/>
+                  <a:srgbClr val="26231F"/>
                 </a:solidFill>
               </a:rPr>
               <a:t>신랑 이름 ♥ 신부 이름</a:t>
@@ -3438,10 +3532,10 @@
             <a:r>
               <a:rPr sz="1400" b="0" i="0">
                 <a:solidFill>
-                  <a:srgbClr val="666666"/>
+                  <a:srgbClr val="26231F"/>
                 </a:solidFill>
               </a:rPr>
-              <a:t>2027. 00. 00 · 예식장 이름</a:t>
+              <a:t>날짜 입력 · 예식장 이름</a:t>
             </a:r>
           </a:p>
         </p:txBody>
@@ -3480,14 +3574,83 @@
         </p:nvSpPr>
         <p:spPr>
           <a:xfrm>
-            <a:off x="9905695" y="-1463040"/>
-            <a:ext cx="3840480" cy="3840480"/>
+            <a:off x="640080" y="566928"/>
+            <a:ext cx="64008" cy="868680"/>
+          </a:xfrm>
+          <a:prstGeom prst="roundRect">
+            <a:avLst>
+              <a:gd name="adj" fmla="val 50000"/>
+            </a:avLst>
+          </a:prstGeom>
+          <a:solidFill>
+            <a:srgbClr val="C997ED"/>
+          </a:solidFill>
+          <a:ln>
+            <a:noFill/>
+          </a:ln>
+        </p:spPr>
+        <p:txBody>
+          <a:bodyPr rtlCol="0" anchor="ctr"/>
+          <a:lstStyle/>
+          <a:p>
+            <a:pPr algn="ctr"/>
+          </a:p>
+        </p:txBody>
+      </p:sp>
+      <p:sp>
+        <p:nvSpPr>
+          <p:cNvPr id="4" name="상단 라벨"/>
+          <p:cNvSpPr txBox="1"/>
+          <p:nvPr/>
+        </p:nvSpPr>
+        <p:spPr>
+          <a:xfrm>
+            <a:off x="868680" y="274320"/>
+            <a:ext cx="5486400" cy="274320"/>
+          </a:xfrm>
+          <a:prstGeom prst="rect">
+            <a:avLst/>
+          </a:prstGeom>
+          <a:noFill/>
+        </p:spPr>
+        <p:txBody>
+          <a:bodyPr wrap="square" lIns="54864" rIns="54864" tIns="27432" bIns="27432" anchor="ctr">
+            <a:noAutofit/>
+          </a:bodyPr>
+          <a:lstStyle/>
+          <a:p>
+            <a:pPr algn="l">
+              <a:lnSpc>
+                <a:spcPct val="115000"/>
+              </a:lnSpc>
+            </a:pPr>
+            <a:r>
+              <a:rPr sz="900" b="1" i="0" spc="250">
+                <a:solidFill>
+                  <a:srgbClr val="8E8780"/>
+                </a:solidFill>
+              </a:rPr>
+              <a:t>WEDDING</a:t>
+            </a:r>
+          </a:p>
+        </p:txBody>
+      </p:sp>
+      <p:sp>
+        <p:nvSpPr>
+          <p:cNvPr id="5" name="포인트"/>
+          <p:cNvSpPr/>
+          <p:nvPr/>
+        </p:nvSpPr>
+        <p:spPr>
+          <a:xfrm>
+            <a:off x="11167567" y="667512"/>
+            <a:ext cx="310896" cy="310896"/>
           </a:xfrm>
           <a:prstGeom prst="ellipse">
             <a:avLst/>
           </a:prstGeom>
           <a:solidFill>
-            <a:srgbClr val="E8D4F7"/>
+            <a:srgbClr val="D2A6F2"/>
           </a:solidFill>
           <a:ln>
             <a:noFill/>
@@ -3503,35 +3666,6 @@
       </p:sp>
       <p:sp>
         <p:nvSpPr>
-          <p:cNvPr id="4" name="장식"/>
-          <p:cNvSpPr/>
-          <p:nvPr/>
-        </p:nvSpPr>
-        <p:spPr>
-          <a:xfrm>
-            <a:off x="11094415" y="274320"/>
-            <a:ext cx="411480" cy="411480"/>
-          </a:xfrm>
-          <a:prstGeom prst="ellipse">
-            <a:avLst/>
-          </a:prstGeom>
-          <a:solidFill>
-            <a:srgbClr val="9651C8"/>
-          </a:solidFill>
-          <a:ln>
-            <a:noFill/>
-          </a:ln>
-        </p:spPr>
-        <p:txBody>
-          <a:bodyPr rtlCol="0" anchor="ctr"/>
-          <a:lstStyle/>
-          <a:p>
-            <a:pPr algn="ctr"/>
-          </a:p>
-        </p:txBody>
-      </p:sp>
-      <p:sp>
-        <p:nvSpPr>
           <p:cNvPr id="2" name="Title 1"/>
           <p:cNvSpPr>
             <a:spLocks noGrp="1"/>
@@ -3542,8 +3676,8 @@
         </p:nvSpPr>
         <p:spPr>
           <a:xfrm>
-            <a:off x="640080" y="457200"/>
-            <a:ext cx="9722815" cy="868680"/>
+            <a:off x="868680" y="566928"/>
+            <a:ext cx="9448495" cy="868680"/>
           </a:xfrm>
         </p:spPr>
         <p:txBody>
@@ -3560,7 +3694,7 @@
             <a:r>
               <a:rPr sz="3000" b="1" i="0">
                 <a:solidFill>
-                  <a:srgbClr val="4E226D"/>
+                  <a:srgbClr val="26231F"/>
                 </a:solidFill>
               </a:rPr>
               <a:t>신랑 · 신부 소개</a:t>
@@ -3570,25 +3704,23 @@
       </p:sp>
       <p:sp>
         <p:nvSpPr>
-          <p:cNvPr id="5" name="사진 자리"/>
+          <p:cNvPr id="6" name="사진 자리"/>
           <p:cNvSpPr/>
           <p:nvPr/>
         </p:nvSpPr>
         <p:spPr>
           <a:xfrm>
-            <a:off x="1939213" y="1600200"/>
-            <a:ext cx="2400300" cy="2400300"/>
+            <a:off x="1996363" y="1783080"/>
+            <a:ext cx="2286000" cy="2286000"/>
           </a:xfrm>
           <a:prstGeom prst="ellipse">
             <a:avLst/>
           </a:prstGeom>
           <a:solidFill>
-            <a:srgbClr val="E8D4F7"/>
+            <a:srgbClr val="E9D1FA"/>
           </a:solidFill>
           <a:ln w="19050">
-            <a:solidFill>
-              <a:srgbClr val="9651C8"/>
-            </a:solidFill>
+            <a:noFill/>
             <a:prstDash val="dash"/>
           </a:ln>
         </p:spPr>
@@ -3606,7 +3738,7 @@
             <a:r>
               <a:rPr sz="1200" b="0" i="0">
                 <a:solidFill>
-                  <a:srgbClr val="4E226D"/>
+                  <a:srgbClr val="8E8780"/>
                 </a:solidFill>
               </a:rPr>
               <a:t>사진</a:t>
@@ -3616,13 +3748,13 @@
       </p:sp>
       <p:sp>
         <p:nvSpPr>
-          <p:cNvPr id="6" name="TextBox 5"/>
+          <p:cNvPr id="7" name="TextBox 6"/>
           <p:cNvSpPr txBox="1"/>
           <p:nvPr/>
         </p:nvSpPr>
         <p:spPr>
           <a:xfrm>
-            <a:off x="640080" y="4091939"/>
+            <a:off x="640080" y="4160520"/>
             <a:ext cx="4998567" cy="411480"/>
           </a:xfrm>
           <a:prstGeom prst="rect">
@@ -3644,7 +3776,7 @@
             <a:r>
               <a:rPr sz="1600" b="1" i="0">
                 <a:solidFill>
-                  <a:srgbClr val="4E226D"/>
+                  <a:srgbClr val="3B2749"/>
                 </a:solidFill>
               </a:rPr>
               <a:t>신랑</a:t>
@@ -3654,14 +3786,14 @@
       </p:sp>
       <p:sp>
         <p:nvSpPr>
-          <p:cNvPr id="7" name="TextBox 6"/>
+          <p:cNvPr id="8" name="TextBox 7"/>
           <p:cNvSpPr txBox="1"/>
           <p:nvPr/>
         </p:nvSpPr>
         <p:spPr>
           <a:xfrm>
-            <a:off x="731519" y="4549140"/>
-            <a:ext cx="4815687" cy="1851660"/>
+            <a:off x="731519" y="4617720"/>
+            <a:ext cx="4815687" cy="1737360"/>
           </a:xfrm>
           <a:prstGeom prst="rect">
             <a:avLst/>
@@ -3722,25 +3854,23 @@
       </p:sp>
       <p:sp>
         <p:nvSpPr>
-          <p:cNvPr id="8" name="사진 자리"/>
+          <p:cNvPr id="9" name="사진 자리"/>
           <p:cNvSpPr/>
           <p:nvPr/>
         </p:nvSpPr>
         <p:spPr>
           <a:xfrm>
-            <a:off x="7852181" y="1600200"/>
-            <a:ext cx="2400300" cy="2400300"/>
+            <a:off x="7909331" y="1783080"/>
+            <a:ext cx="2286000" cy="2286000"/>
           </a:xfrm>
           <a:prstGeom prst="ellipse">
             <a:avLst/>
           </a:prstGeom>
           <a:solidFill>
-            <a:srgbClr val="E8D4F7"/>
+            <a:srgbClr val="E9D1FA"/>
           </a:solidFill>
           <a:ln w="19050">
-            <a:solidFill>
-              <a:srgbClr val="9651C8"/>
-            </a:solidFill>
+            <a:noFill/>
             <a:prstDash val="dash"/>
           </a:ln>
         </p:spPr>
@@ -3758,7 +3888,7 @@
             <a:r>
               <a:rPr sz="1200" b="0" i="0">
                 <a:solidFill>
-                  <a:srgbClr val="4E226D"/>
+                  <a:srgbClr val="8E8780"/>
                 </a:solidFill>
               </a:rPr>
               <a:t>사진</a:t>
@@ -3768,13 +3898,13 @@
       </p:sp>
       <p:sp>
         <p:nvSpPr>
-          <p:cNvPr id="9" name="TextBox 8"/>
+          <p:cNvPr id="10" name="TextBox 9"/>
           <p:cNvSpPr txBox="1"/>
           <p:nvPr/>
         </p:nvSpPr>
         <p:spPr>
           <a:xfrm>
-            <a:off x="6553047" y="4091939"/>
+            <a:off x="6553047" y="4160520"/>
             <a:ext cx="4998567" cy="411480"/>
           </a:xfrm>
           <a:prstGeom prst="rect">
@@ -3796,7 +3926,7 @@
             <a:r>
               <a:rPr sz="1600" b="1" i="0">
                 <a:solidFill>
-                  <a:srgbClr val="4E226D"/>
+                  <a:srgbClr val="3B2749"/>
                 </a:solidFill>
               </a:rPr>
               <a:t>신부</a:t>
@@ -3806,14 +3936,14 @@
       </p:sp>
       <p:sp>
         <p:nvSpPr>
-          <p:cNvPr id="10" name="TextBox 9"/>
+          <p:cNvPr id="11" name="TextBox 10"/>
           <p:cNvSpPr txBox="1"/>
           <p:nvPr/>
         </p:nvSpPr>
         <p:spPr>
           <a:xfrm>
-            <a:off x="6644487" y="4549140"/>
-            <a:ext cx="4815687" cy="1851660"/>
+            <a:off x="6644487" y="4617720"/>
+            <a:ext cx="4815687" cy="1737360"/>
           </a:xfrm>
           <a:prstGeom prst="rect">
             <a:avLst/>
@@ -3906,14 +4036,83 @@
         </p:nvSpPr>
         <p:spPr>
           <a:xfrm>
-            <a:off x="9905695" y="-1463040"/>
-            <a:ext cx="3840480" cy="3840480"/>
+            <a:off x="640080" y="566928"/>
+            <a:ext cx="64008" cy="868680"/>
+          </a:xfrm>
+          <a:prstGeom prst="roundRect">
+            <a:avLst>
+              <a:gd name="adj" fmla="val 50000"/>
+            </a:avLst>
+          </a:prstGeom>
+          <a:solidFill>
+            <a:srgbClr val="C997ED"/>
+          </a:solidFill>
+          <a:ln>
+            <a:noFill/>
+          </a:ln>
+        </p:spPr>
+        <p:txBody>
+          <a:bodyPr rtlCol="0" anchor="ctr"/>
+          <a:lstStyle/>
+          <a:p>
+            <a:pPr algn="ctr"/>
+          </a:p>
+        </p:txBody>
+      </p:sp>
+      <p:sp>
+        <p:nvSpPr>
+          <p:cNvPr id="4" name="상단 라벨"/>
+          <p:cNvSpPr txBox="1"/>
+          <p:nvPr/>
+        </p:nvSpPr>
+        <p:spPr>
+          <a:xfrm>
+            <a:off x="868680" y="274320"/>
+            <a:ext cx="5486400" cy="274320"/>
+          </a:xfrm>
+          <a:prstGeom prst="rect">
+            <a:avLst/>
+          </a:prstGeom>
+          <a:noFill/>
+        </p:spPr>
+        <p:txBody>
+          <a:bodyPr wrap="square" lIns="54864" rIns="54864" tIns="27432" bIns="27432" anchor="ctr">
+            <a:noAutofit/>
+          </a:bodyPr>
+          <a:lstStyle/>
+          <a:p>
+            <a:pPr algn="l">
+              <a:lnSpc>
+                <a:spcPct val="115000"/>
+              </a:lnSpc>
+            </a:pPr>
+            <a:r>
+              <a:rPr sz="900" b="1" i="0" spc="250">
+                <a:solidFill>
+                  <a:srgbClr val="8E8780"/>
+                </a:solidFill>
+              </a:rPr>
+              <a:t>WEDDING</a:t>
+            </a:r>
+          </a:p>
+        </p:txBody>
+      </p:sp>
+      <p:sp>
+        <p:nvSpPr>
+          <p:cNvPr id="5" name="포인트"/>
+          <p:cNvSpPr/>
+          <p:nvPr/>
+        </p:nvSpPr>
+        <p:spPr>
+          <a:xfrm>
+            <a:off x="11167567" y="667512"/>
+            <a:ext cx="310896" cy="310896"/>
           </a:xfrm>
           <a:prstGeom prst="ellipse">
             <a:avLst/>
           </a:prstGeom>
           <a:solidFill>
-            <a:srgbClr val="E8D4F7"/>
+            <a:srgbClr val="D2A6F2"/>
           </a:solidFill>
           <a:ln>
             <a:noFill/>
@@ -3929,35 +4128,6 @@
       </p:sp>
       <p:sp>
         <p:nvSpPr>
-          <p:cNvPr id="4" name="장식"/>
-          <p:cNvSpPr/>
-          <p:nvPr/>
-        </p:nvSpPr>
-        <p:spPr>
-          <a:xfrm>
-            <a:off x="11094415" y="274320"/>
-            <a:ext cx="411480" cy="411480"/>
-          </a:xfrm>
-          <a:prstGeom prst="ellipse">
-            <a:avLst/>
-          </a:prstGeom>
-          <a:solidFill>
-            <a:srgbClr val="9651C8"/>
-          </a:solidFill>
-          <a:ln>
-            <a:noFill/>
-          </a:ln>
-        </p:spPr>
-        <p:txBody>
-          <a:bodyPr rtlCol="0" anchor="ctr"/>
-          <a:lstStyle/>
-          <a:p>
-            <a:pPr algn="ctr"/>
-          </a:p>
-        </p:txBody>
-      </p:sp>
-      <p:sp>
-        <p:nvSpPr>
           <p:cNvPr id="2" name="Title 1"/>
           <p:cNvSpPr>
             <a:spLocks noGrp="1"/>
@@ -3968,8 +4138,8 @@
         </p:nvSpPr>
         <p:spPr>
           <a:xfrm>
-            <a:off x="640080" y="457200"/>
-            <a:ext cx="9722815" cy="868680"/>
+            <a:off x="868680" y="566928"/>
+            <a:ext cx="9448495" cy="868680"/>
           </a:xfrm>
         </p:spPr>
         <p:txBody>
@@ -3986,7 +4156,7 @@
             <a:r>
               <a:rPr sz="3000" b="1" i="0">
                 <a:solidFill>
-                  <a:srgbClr val="4E226D"/>
+                  <a:srgbClr val="26231F"/>
                 </a:solidFill>
               </a:rPr>
               <a:t>우리 두 사람</a:t>
@@ -3996,27 +4166,25 @@
       </p:sp>
       <p:sp>
         <p:nvSpPr>
-          <p:cNvPr id="5" name="왼쪽 칸"/>
+          <p:cNvPr id="6" name="왼쪽 칸"/>
           <p:cNvSpPr/>
           <p:nvPr/>
         </p:nvSpPr>
         <p:spPr>
           <a:xfrm>
-            <a:off x="640080" y="1600200"/>
-            <a:ext cx="5272887" cy="4800600"/>
+            <a:off x="640080" y="1783080"/>
+            <a:ext cx="5272887" cy="4572000"/>
           </a:xfrm>
           <a:prstGeom prst="roundRect">
             <a:avLst>
-              <a:gd name="adj" fmla="val 8000"/>
+              <a:gd name="adj" fmla="val 7000"/>
             </a:avLst>
           </a:prstGeom>
           <a:solidFill>
-            <a:srgbClr val="F8F3FC"/>
+            <a:srgbClr val="F5EAFD"/>
           </a:solidFill>
-          <a:ln w="12700">
-            <a:solidFill>
-              <a:srgbClr val="E8D4F7"/>
-            </a:solidFill>
+          <a:ln>
+            <a:noFill/>
           </a:ln>
         </p:spPr>
         <p:txBody>
@@ -4029,13 +4197,13 @@
       </p:sp>
       <p:sp>
         <p:nvSpPr>
-          <p:cNvPr id="6" name="칸 제목 바"/>
+          <p:cNvPr id="7" name="칸 제목 바"/>
           <p:cNvSpPr/>
           <p:nvPr/>
         </p:nvSpPr>
         <p:spPr>
           <a:xfrm>
-            <a:off x="640080" y="1600200"/>
+            <a:off x="640080" y="1783080"/>
             <a:ext cx="5272887" cy="640080"/>
           </a:xfrm>
           <a:prstGeom prst="roundRect">
@@ -4044,7 +4212,7 @@
             </a:avLst>
           </a:prstGeom>
           <a:solidFill>
-            <a:srgbClr val="9651C8"/>
+            <a:srgbClr val="C997ED"/>
           </a:solidFill>
           <a:ln>
             <a:noFill/>
@@ -4060,13 +4228,13 @@
       </p:sp>
       <p:sp>
         <p:nvSpPr>
-          <p:cNvPr id="7" name="TextBox 6"/>
+          <p:cNvPr id="8" name="TextBox 7"/>
           <p:cNvSpPr txBox="1"/>
           <p:nvPr/>
         </p:nvSpPr>
         <p:spPr>
           <a:xfrm>
-            <a:off x="822959" y="1600200"/>
+            <a:off x="822959" y="1783080"/>
             <a:ext cx="4907127" cy="640080"/>
           </a:xfrm>
           <a:prstGeom prst="rect">
@@ -4088,7 +4256,7 @@
             <a:r>
               <a:rPr sz="1800" b="1" i="0">
                 <a:solidFill>
-                  <a:srgbClr val="FFFFFF"/>
+                  <a:srgbClr val="26231F"/>
                 </a:solidFill>
               </a:rPr>
               <a:t>닮은 점</a:t>
@@ -4098,14 +4266,14 @@
       </p:sp>
       <p:sp>
         <p:nvSpPr>
-          <p:cNvPr id="8" name="TextBox 7"/>
+          <p:cNvPr id="9" name="TextBox 8"/>
           <p:cNvSpPr txBox="1"/>
           <p:nvPr/>
         </p:nvSpPr>
         <p:spPr>
           <a:xfrm>
-            <a:off x="868680" y="2423160"/>
-            <a:ext cx="4815687" cy="3886200"/>
+            <a:off x="868680" y="2606040"/>
+            <a:ext cx="4815687" cy="3657600"/>
           </a:xfrm>
           <a:prstGeom prst="rect">
             <a:avLst/>
@@ -4131,7 +4299,7 @@
             <a:r>
               <a:rPr sz="1500" b="0" i="0">
                 <a:solidFill>
-                  <a:srgbClr val="2B2B2B"/>
+                  <a:srgbClr val="26231F"/>
                 </a:solidFill>
               </a:rPr>
               <a:t>내용을 입력하세요</a:t>
@@ -4151,7 +4319,7 @@
             <a:r>
               <a:rPr sz="1500" b="0" i="0">
                 <a:solidFill>
-                  <a:srgbClr val="2B2B2B"/>
+                  <a:srgbClr val="26231F"/>
                 </a:solidFill>
               </a:rPr>
               <a:t>내용을 입력하세요</a:t>
@@ -4171,7 +4339,7 @@
             <a:r>
               <a:rPr sz="1500" b="0" i="0">
                 <a:solidFill>
-                  <a:srgbClr val="2B2B2B"/>
+                  <a:srgbClr val="26231F"/>
                 </a:solidFill>
               </a:rPr>
               <a:t>내용을 입력하세요</a:t>
@@ -4181,27 +4349,25 @@
       </p:sp>
       <p:sp>
         <p:nvSpPr>
-          <p:cNvPr id="9" name="오른쪽 칸"/>
+          <p:cNvPr id="10" name="오른쪽 칸"/>
           <p:cNvSpPr/>
           <p:nvPr/>
         </p:nvSpPr>
         <p:spPr>
           <a:xfrm>
-            <a:off x="6278727" y="1600200"/>
-            <a:ext cx="5272887" cy="4800600"/>
+            <a:off x="6278727" y="1783080"/>
+            <a:ext cx="5272887" cy="4572000"/>
           </a:xfrm>
           <a:prstGeom prst="roundRect">
             <a:avLst>
-              <a:gd name="adj" fmla="val 8000"/>
+              <a:gd name="adj" fmla="val 7000"/>
             </a:avLst>
           </a:prstGeom>
           <a:solidFill>
-            <a:srgbClr val="E8D4F7"/>
+            <a:srgbClr val="E9D1FA"/>
           </a:solidFill>
-          <a:ln w="12700">
-            <a:solidFill>
-              <a:srgbClr val="E8D4F7"/>
-            </a:solidFill>
+          <a:ln>
+            <a:noFill/>
           </a:ln>
         </p:spPr>
         <p:txBody>
@@ -4214,13 +4380,13 @@
       </p:sp>
       <p:sp>
         <p:nvSpPr>
-          <p:cNvPr id="10" name="칸 제목 바"/>
+          <p:cNvPr id="11" name="칸 제목 바"/>
           <p:cNvSpPr/>
           <p:nvPr/>
         </p:nvSpPr>
         <p:spPr>
           <a:xfrm>
-            <a:off x="6278727" y="1600200"/>
+            <a:off x="6278727" y="1783080"/>
             <a:ext cx="5272887" cy="640080"/>
           </a:xfrm>
           <a:prstGeom prst="roundRect">
@@ -4229,7 +4395,7 @@
             </a:avLst>
           </a:prstGeom>
           <a:solidFill>
-            <a:srgbClr val="4E226D"/>
+            <a:srgbClr val="3B2749"/>
           </a:solidFill>
           <a:ln>
             <a:noFill/>
@@ -4245,13 +4411,13 @@
       </p:sp>
       <p:sp>
         <p:nvSpPr>
-          <p:cNvPr id="11" name="TextBox 10"/>
+          <p:cNvPr id="12" name="TextBox 11"/>
           <p:cNvSpPr txBox="1"/>
           <p:nvPr/>
         </p:nvSpPr>
         <p:spPr>
           <a:xfrm>
-            <a:off x="6461607" y="1600200"/>
+            <a:off x="6461607" y="1783080"/>
             <a:ext cx="4907127" cy="640080"/>
           </a:xfrm>
           <a:prstGeom prst="rect">
@@ -4283,14 +4449,14 @@
       </p:sp>
       <p:sp>
         <p:nvSpPr>
-          <p:cNvPr id="12" name="TextBox 11"/>
+          <p:cNvPr id="13" name="TextBox 12"/>
           <p:cNvSpPr txBox="1"/>
           <p:nvPr/>
         </p:nvSpPr>
         <p:spPr>
           <a:xfrm>
-            <a:off x="6507327" y="2423160"/>
-            <a:ext cx="4815687" cy="3886200"/>
+            <a:off x="6507327" y="2606040"/>
+            <a:ext cx="4815687" cy="3657600"/>
           </a:xfrm>
           <a:prstGeom prst="rect">
             <a:avLst/>
@@ -4316,7 +4482,7 @@
             <a:r>
               <a:rPr sz="1500" b="0" i="0">
                 <a:solidFill>
-                  <a:srgbClr val="2B2B2B"/>
+                  <a:srgbClr val="26231F"/>
                 </a:solidFill>
               </a:rPr>
               <a:t>내용을 입력하세요</a:t>
@@ -4336,7 +4502,7 @@
             <a:r>
               <a:rPr sz="1500" b="0" i="0">
                 <a:solidFill>
-                  <a:srgbClr val="2B2B2B"/>
+                  <a:srgbClr val="26231F"/>
                 </a:solidFill>
               </a:rPr>
               <a:t>내용을 입력하세요</a:t>
@@ -4356,7 +4522,7 @@
             <a:r>
               <a:rPr sz="1500" b="0" i="0">
                 <a:solidFill>
-                  <a:srgbClr val="2B2B2B"/>
+                  <a:srgbClr val="26231F"/>
                 </a:solidFill>
               </a:rPr>
               <a:t>내용을 입력하세요</a:t>
@@ -4398,14 +4564,83 @@
         </p:nvSpPr>
         <p:spPr>
           <a:xfrm>
-            <a:off x="9905695" y="-1463040"/>
-            <a:ext cx="3840480" cy="3840480"/>
+            <a:off x="640080" y="566928"/>
+            <a:ext cx="64008" cy="868680"/>
+          </a:xfrm>
+          <a:prstGeom prst="roundRect">
+            <a:avLst>
+              <a:gd name="adj" fmla="val 50000"/>
+            </a:avLst>
+          </a:prstGeom>
+          <a:solidFill>
+            <a:srgbClr val="C997ED"/>
+          </a:solidFill>
+          <a:ln>
+            <a:noFill/>
+          </a:ln>
+        </p:spPr>
+        <p:txBody>
+          <a:bodyPr rtlCol="0" anchor="ctr"/>
+          <a:lstStyle/>
+          <a:p>
+            <a:pPr algn="ctr"/>
+          </a:p>
+        </p:txBody>
+      </p:sp>
+      <p:sp>
+        <p:nvSpPr>
+          <p:cNvPr id="4" name="상단 라벨"/>
+          <p:cNvSpPr txBox="1"/>
+          <p:nvPr/>
+        </p:nvSpPr>
+        <p:spPr>
+          <a:xfrm>
+            <a:off x="868680" y="274320"/>
+            <a:ext cx="5486400" cy="274320"/>
+          </a:xfrm>
+          <a:prstGeom prst="rect">
+            <a:avLst/>
+          </a:prstGeom>
+          <a:noFill/>
+        </p:spPr>
+        <p:txBody>
+          <a:bodyPr wrap="square" lIns="54864" rIns="54864" tIns="27432" bIns="27432" anchor="ctr">
+            <a:noAutofit/>
+          </a:bodyPr>
+          <a:lstStyle/>
+          <a:p>
+            <a:pPr algn="l">
+              <a:lnSpc>
+                <a:spcPct val="115000"/>
+              </a:lnSpc>
+            </a:pPr>
+            <a:r>
+              <a:rPr sz="900" b="1" i="0" spc="250">
+                <a:solidFill>
+                  <a:srgbClr val="8E8780"/>
+                </a:solidFill>
+              </a:rPr>
+              <a:t>WEDDING</a:t>
+            </a:r>
+          </a:p>
+        </p:txBody>
+      </p:sp>
+      <p:sp>
+        <p:nvSpPr>
+          <p:cNvPr id="5" name="포인트"/>
+          <p:cNvSpPr/>
+          <p:nvPr/>
+        </p:nvSpPr>
+        <p:spPr>
+          <a:xfrm>
+            <a:off x="11167567" y="667512"/>
+            <a:ext cx="310896" cy="310896"/>
           </a:xfrm>
           <a:prstGeom prst="ellipse">
             <a:avLst/>
           </a:prstGeom>
           <a:solidFill>
-            <a:srgbClr val="E8D4F7"/>
+            <a:srgbClr val="D2A6F2"/>
           </a:solidFill>
           <a:ln>
             <a:noFill/>
@@ -4421,35 +4656,6 @@
       </p:sp>
       <p:sp>
         <p:nvSpPr>
-          <p:cNvPr id="4" name="장식"/>
-          <p:cNvSpPr/>
-          <p:nvPr/>
-        </p:nvSpPr>
-        <p:spPr>
-          <a:xfrm>
-            <a:off x="11094415" y="274320"/>
-            <a:ext cx="411480" cy="411480"/>
-          </a:xfrm>
-          <a:prstGeom prst="ellipse">
-            <a:avLst/>
-          </a:prstGeom>
-          <a:solidFill>
-            <a:srgbClr val="9651C8"/>
-          </a:solidFill>
-          <a:ln>
-            <a:noFill/>
-          </a:ln>
-        </p:spPr>
-        <p:txBody>
-          <a:bodyPr rtlCol="0" anchor="ctr"/>
-          <a:lstStyle/>
-          <a:p>
-            <a:pPr algn="ctr"/>
-          </a:p>
-        </p:txBody>
-      </p:sp>
-      <p:sp>
-        <p:nvSpPr>
           <p:cNvPr id="2" name="Title 1"/>
           <p:cNvSpPr>
             <a:spLocks noGrp="1"/>
@@ -4460,8 +4666,8 @@
         </p:nvSpPr>
         <p:spPr>
           <a:xfrm>
-            <a:off x="640080" y="457200"/>
-            <a:ext cx="9722815" cy="868680"/>
+            <a:off x="868680" y="566928"/>
+            <a:ext cx="9448495" cy="868680"/>
           </a:xfrm>
         </p:spPr>
         <p:txBody>
@@ -4478,7 +4684,7 @@
             <a:r>
               <a:rPr sz="3000" b="1" i="0">
                 <a:solidFill>
-                  <a:srgbClr val="4E226D"/>
+                  <a:srgbClr val="26231F"/>
                 </a:solidFill>
               </a:rPr>
               <a:t>서로에게 하고 싶은 말</a:t>
@@ -4488,27 +4694,25 @@
       </p:sp>
       <p:sp>
         <p:nvSpPr>
-          <p:cNvPr id="5" name="왼쪽 칸"/>
+          <p:cNvPr id="6" name="왼쪽 칸"/>
           <p:cNvSpPr/>
           <p:nvPr/>
         </p:nvSpPr>
         <p:spPr>
           <a:xfrm>
-            <a:off x="640080" y="1600200"/>
-            <a:ext cx="5272887" cy="4800600"/>
+            <a:off x="640080" y="1783080"/>
+            <a:ext cx="5272887" cy="4572000"/>
           </a:xfrm>
           <a:prstGeom prst="roundRect">
             <a:avLst>
-              <a:gd name="adj" fmla="val 8000"/>
+              <a:gd name="adj" fmla="val 7000"/>
             </a:avLst>
           </a:prstGeom>
           <a:solidFill>
-            <a:srgbClr val="F8F3FC"/>
+            <a:srgbClr val="F5EAFD"/>
           </a:solidFill>
-          <a:ln w="12700">
-            <a:solidFill>
-              <a:srgbClr val="E8D4F7"/>
-            </a:solidFill>
+          <a:ln>
+            <a:noFill/>
           </a:ln>
         </p:spPr>
         <p:txBody>
@@ -4521,13 +4725,13 @@
       </p:sp>
       <p:sp>
         <p:nvSpPr>
-          <p:cNvPr id="6" name="칸 제목 바"/>
+          <p:cNvPr id="7" name="칸 제목 바"/>
           <p:cNvSpPr/>
           <p:nvPr/>
         </p:nvSpPr>
         <p:spPr>
           <a:xfrm>
-            <a:off x="640080" y="1600200"/>
+            <a:off x="640080" y="1783080"/>
             <a:ext cx="5272887" cy="640080"/>
           </a:xfrm>
           <a:prstGeom prst="roundRect">
@@ -4536,7 +4740,7 @@
             </a:avLst>
           </a:prstGeom>
           <a:solidFill>
-            <a:srgbClr val="9651C8"/>
+            <a:srgbClr val="C997ED"/>
           </a:solidFill>
           <a:ln>
             <a:noFill/>
@@ -4552,13 +4756,13 @@
       </p:sp>
       <p:sp>
         <p:nvSpPr>
-          <p:cNvPr id="7" name="TextBox 6"/>
+          <p:cNvPr id="8" name="TextBox 7"/>
           <p:cNvSpPr txBox="1"/>
           <p:nvPr/>
         </p:nvSpPr>
         <p:spPr>
           <a:xfrm>
-            <a:off x="822959" y="1600200"/>
+            <a:off x="822959" y="1783080"/>
             <a:ext cx="4907127" cy="640080"/>
           </a:xfrm>
           <a:prstGeom prst="rect">
@@ -4580,7 +4784,7 @@
             <a:r>
               <a:rPr sz="1800" b="1" i="0">
                 <a:solidFill>
-                  <a:srgbClr val="FFFFFF"/>
+                  <a:srgbClr val="26231F"/>
                 </a:solidFill>
               </a:rPr>
               <a:t>신랑이 신부에게</a:t>
@@ -4590,14 +4794,14 @@
       </p:sp>
       <p:sp>
         <p:nvSpPr>
-          <p:cNvPr id="8" name="TextBox 7"/>
+          <p:cNvPr id="9" name="TextBox 8"/>
           <p:cNvSpPr txBox="1"/>
           <p:nvPr/>
         </p:nvSpPr>
         <p:spPr>
           <a:xfrm>
-            <a:off x="868680" y="2423160"/>
-            <a:ext cx="4815687" cy="3886200"/>
+            <a:off x="868680" y="2606040"/>
+            <a:ext cx="4815687" cy="3657600"/>
           </a:xfrm>
           <a:prstGeom prst="rect">
             <a:avLst/>
@@ -4623,7 +4827,7 @@
             <a:r>
               <a:rPr sz="1500" b="0" i="0">
                 <a:solidFill>
-                  <a:srgbClr val="2B2B2B"/>
+                  <a:srgbClr val="26231F"/>
                 </a:solidFill>
               </a:rPr>
               <a:t>하고 싶은 말을 적어 주세요</a:t>
@@ -4633,27 +4837,25 @@
       </p:sp>
       <p:sp>
         <p:nvSpPr>
-          <p:cNvPr id="9" name="오른쪽 칸"/>
+          <p:cNvPr id="10" name="오른쪽 칸"/>
           <p:cNvSpPr/>
           <p:nvPr/>
         </p:nvSpPr>
         <p:spPr>
           <a:xfrm>
-            <a:off x="6278727" y="1600200"/>
-            <a:ext cx="5272887" cy="4800600"/>
+            <a:off x="6278727" y="1783080"/>
+            <a:ext cx="5272887" cy="4572000"/>
           </a:xfrm>
           <a:prstGeom prst="roundRect">
             <a:avLst>
-              <a:gd name="adj" fmla="val 8000"/>
+              <a:gd name="adj" fmla="val 7000"/>
             </a:avLst>
           </a:prstGeom>
           <a:solidFill>
-            <a:srgbClr val="E8D4F7"/>
+            <a:srgbClr val="E9D1FA"/>
           </a:solidFill>
-          <a:ln w="12700">
-            <a:solidFill>
-              <a:srgbClr val="E8D4F7"/>
-            </a:solidFill>
+          <a:ln>
+            <a:noFill/>
           </a:ln>
         </p:spPr>
         <p:txBody>
@@ -4666,13 +4868,13 @@
       </p:sp>
       <p:sp>
         <p:nvSpPr>
-          <p:cNvPr id="10" name="칸 제목 바"/>
+          <p:cNvPr id="11" name="칸 제목 바"/>
           <p:cNvSpPr/>
           <p:nvPr/>
         </p:nvSpPr>
         <p:spPr>
           <a:xfrm>
-            <a:off x="6278727" y="1600200"/>
+            <a:off x="6278727" y="1783080"/>
             <a:ext cx="5272887" cy="640080"/>
           </a:xfrm>
           <a:prstGeom prst="roundRect">
@@ -4681,7 +4883,7 @@
             </a:avLst>
           </a:prstGeom>
           <a:solidFill>
-            <a:srgbClr val="4E226D"/>
+            <a:srgbClr val="3B2749"/>
           </a:solidFill>
           <a:ln>
             <a:noFill/>
@@ -4697,13 +4899,13 @@
       </p:sp>
       <p:sp>
         <p:nvSpPr>
-          <p:cNvPr id="11" name="TextBox 10"/>
+          <p:cNvPr id="12" name="TextBox 11"/>
           <p:cNvSpPr txBox="1"/>
           <p:nvPr/>
         </p:nvSpPr>
         <p:spPr>
           <a:xfrm>
-            <a:off x="6461607" y="1600200"/>
+            <a:off x="6461607" y="1783080"/>
             <a:ext cx="4907127" cy="640080"/>
           </a:xfrm>
           <a:prstGeom prst="rect">
@@ -4735,14 +4937,14 @@
       </p:sp>
       <p:sp>
         <p:nvSpPr>
-          <p:cNvPr id="12" name="TextBox 11"/>
+          <p:cNvPr id="13" name="TextBox 12"/>
           <p:cNvSpPr txBox="1"/>
           <p:nvPr/>
         </p:nvSpPr>
         <p:spPr>
           <a:xfrm>
-            <a:off x="6507327" y="2423160"/>
-            <a:ext cx="4815687" cy="3886200"/>
+            <a:off x="6507327" y="2606040"/>
+            <a:ext cx="4815687" cy="3657600"/>
           </a:xfrm>
           <a:prstGeom prst="rect">
             <a:avLst/>
@@ -4768,7 +4970,7 @@
             <a:r>
               <a:rPr sz="1500" b="0" i="0">
                 <a:solidFill>
-                  <a:srgbClr val="2B2B2B"/>
+                  <a:srgbClr val="26231F"/>
                 </a:solidFill>
               </a:rPr>
               <a:t>하고 싶은 말을 적어 주세요</a:t>
@@ -4810,14 +5012,83 @@
         </p:nvSpPr>
         <p:spPr>
           <a:xfrm>
-            <a:off x="9905695" y="-1463040"/>
-            <a:ext cx="3840480" cy="3840480"/>
+            <a:off x="640080" y="566928"/>
+            <a:ext cx="64008" cy="868680"/>
+          </a:xfrm>
+          <a:prstGeom prst="roundRect">
+            <a:avLst>
+              <a:gd name="adj" fmla="val 50000"/>
+            </a:avLst>
+          </a:prstGeom>
+          <a:solidFill>
+            <a:srgbClr val="C997ED"/>
+          </a:solidFill>
+          <a:ln>
+            <a:noFill/>
+          </a:ln>
+        </p:spPr>
+        <p:txBody>
+          <a:bodyPr rtlCol="0" anchor="ctr"/>
+          <a:lstStyle/>
+          <a:p>
+            <a:pPr algn="ctr"/>
+          </a:p>
+        </p:txBody>
+      </p:sp>
+      <p:sp>
+        <p:nvSpPr>
+          <p:cNvPr id="4" name="상단 라벨"/>
+          <p:cNvSpPr txBox="1"/>
+          <p:nvPr/>
+        </p:nvSpPr>
+        <p:spPr>
+          <a:xfrm>
+            <a:off x="868680" y="274320"/>
+            <a:ext cx="5486400" cy="274320"/>
+          </a:xfrm>
+          <a:prstGeom prst="rect">
+            <a:avLst/>
+          </a:prstGeom>
+          <a:noFill/>
+        </p:spPr>
+        <p:txBody>
+          <a:bodyPr wrap="square" lIns="54864" rIns="54864" tIns="27432" bIns="27432" anchor="ctr">
+            <a:noAutofit/>
+          </a:bodyPr>
+          <a:lstStyle/>
+          <a:p>
+            <a:pPr algn="l">
+              <a:lnSpc>
+                <a:spcPct val="115000"/>
+              </a:lnSpc>
+            </a:pPr>
+            <a:r>
+              <a:rPr sz="900" b="1" i="0" spc="250">
+                <a:solidFill>
+                  <a:srgbClr val="8E8780"/>
+                </a:solidFill>
+              </a:rPr>
+              <a:t>WEDDING</a:t>
+            </a:r>
+          </a:p>
+        </p:txBody>
+      </p:sp>
+      <p:sp>
+        <p:nvSpPr>
+          <p:cNvPr id="5" name="포인트"/>
+          <p:cNvSpPr/>
+          <p:nvPr/>
+        </p:nvSpPr>
+        <p:spPr>
+          <a:xfrm>
+            <a:off x="11167567" y="667512"/>
+            <a:ext cx="310896" cy="310896"/>
           </a:xfrm>
           <a:prstGeom prst="ellipse">
             <a:avLst/>
           </a:prstGeom>
           <a:solidFill>
-            <a:srgbClr val="E8D4F7"/>
+            <a:srgbClr val="D2A6F2"/>
           </a:solidFill>
           <a:ln>
             <a:noFill/>
@@ -4833,35 +5104,6 @@
       </p:sp>
       <p:sp>
         <p:nvSpPr>
-          <p:cNvPr id="4" name="장식"/>
-          <p:cNvSpPr/>
-          <p:nvPr/>
-        </p:nvSpPr>
-        <p:spPr>
-          <a:xfrm>
-            <a:off x="11094415" y="274320"/>
-            <a:ext cx="411480" cy="411480"/>
-          </a:xfrm>
-          <a:prstGeom prst="ellipse">
-            <a:avLst/>
-          </a:prstGeom>
-          <a:solidFill>
-            <a:srgbClr val="9651C8"/>
-          </a:solidFill>
-          <a:ln>
-            <a:noFill/>
-          </a:ln>
-        </p:spPr>
-        <p:txBody>
-          <a:bodyPr rtlCol="0" anchor="ctr"/>
-          <a:lstStyle/>
-          <a:p>
-            <a:pPr algn="ctr"/>
-          </a:p>
-        </p:txBody>
-      </p:sp>
-      <p:sp>
-        <p:nvSpPr>
           <p:cNvPr id="2" name="Title 1"/>
           <p:cNvSpPr>
             <a:spLocks noGrp="1"/>
@@ -4872,8 +5114,8 @@
         </p:nvSpPr>
         <p:spPr>
           <a:xfrm>
-            <a:off x="640080" y="457200"/>
-            <a:ext cx="9722815" cy="868680"/>
+            <a:off x="868680" y="566928"/>
+            <a:ext cx="9448495" cy="868680"/>
           </a:xfrm>
         </p:spPr>
         <p:txBody>
@@ -4890,7 +5132,7 @@
             <a:r>
               <a:rPr sz="3000" b="1" i="0">
                 <a:solidFill>
-                  <a:srgbClr val="4E226D"/>
+                  <a:srgbClr val="26231F"/>
                 </a:solidFill>
               </a:rPr>
               <a:t>웨딩 사진</a:t>
@@ -4900,14 +5142,14 @@
       </p:sp>
       <p:sp>
         <p:nvSpPr>
-          <p:cNvPr id="5" name="사진 자리"/>
+          <p:cNvPr id="6" name="사진 자리"/>
           <p:cNvSpPr/>
           <p:nvPr/>
         </p:nvSpPr>
         <p:spPr>
           <a:xfrm>
-            <a:off x="640080" y="1600200"/>
-            <a:ext cx="3515258" cy="2308860"/>
+            <a:off x="640080" y="1783080"/>
+            <a:ext cx="3515258" cy="2194560"/>
           </a:xfrm>
           <a:prstGeom prst="roundRect">
             <a:avLst>
@@ -4915,12 +5157,10 @@
             </a:avLst>
           </a:prstGeom>
           <a:solidFill>
-            <a:srgbClr val="E8D4F7"/>
+            <a:srgbClr val="E9D1FA"/>
           </a:solidFill>
           <a:ln w="19050">
-            <a:solidFill>
-              <a:srgbClr val="9651C8"/>
-            </a:solidFill>
+            <a:noFill/>
             <a:prstDash val="dash"/>
           </a:ln>
         </p:spPr>
@@ -4938,7 +5178,7 @@
             <a:r>
               <a:rPr sz="1200" b="0" i="0">
                 <a:solidFill>
-                  <a:srgbClr val="4E226D"/>
+                  <a:srgbClr val="8E8780"/>
                 </a:solidFill>
               </a:rPr>
               <a:t>사진 1</a:t>
@@ -4948,14 +5188,14 @@
       </p:sp>
       <p:sp>
         <p:nvSpPr>
-          <p:cNvPr id="6" name="사진 자리"/>
+          <p:cNvPr id="7" name="사진 자리"/>
           <p:cNvSpPr/>
           <p:nvPr/>
         </p:nvSpPr>
         <p:spPr>
           <a:xfrm>
-            <a:off x="4338218" y="1600200"/>
-            <a:ext cx="3515258" cy="2308860"/>
+            <a:off x="4338218" y="1783080"/>
+            <a:ext cx="3515258" cy="2194560"/>
           </a:xfrm>
           <a:prstGeom prst="roundRect">
             <a:avLst>
@@ -4963,12 +5203,10 @@
             </a:avLst>
           </a:prstGeom>
           <a:solidFill>
-            <a:srgbClr val="E8D4F7"/>
+            <a:srgbClr val="E9D1FA"/>
           </a:solidFill>
           <a:ln w="19050">
-            <a:solidFill>
-              <a:srgbClr val="9651C8"/>
-            </a:solidFill>
+            <a:noFill/>
             <a:prstDash val="dash"/>
           </a:ln>
         </p:spPr>
@@ -4986,7 +5224,7 @@
             <a:r>
               <a:rPr sz="1200" b="0" i="0">
                 <a:solidFill>
-                  <a:srgbClr val="4E226D"/>
+                  <a:srgbClr val="8E8780"/>
                 </a:solidFill>
               </a:rPr>
               <a:t>사진 2</a:t>
@@ -4996,14 +5234,14 @@
       </p:sp>
       <p:sp>
         <p:nvSpPr>
-          <p:cNvPr id="7" name="사진 자리"/>
+          <p:cNvPr id="8" name="사진 자리"/>
           <p:cNvSpPr/>
           <p:nvPr/>
         </p:nvSpPr>
         <p:spPr>
           <a:xfrm>
-            <a:off x="8036356" y="1600200"/>
-            <a:ext cx="3515258" cy="2308860"/>
+            <a:off x="8036356" y="1783080"/>
+            <a:ext cx="3515258" cy="2194560"/>
           </a:xfrm>
           <a:prstGeom prst="roundRect">
             <a:avLst>
@@ -5011,12 +5249,10 @@
             </a:avLst>
           </a:prstGeom>
           <a:solidFill>
-            <a:srgbClr val="E8D4F7"/>
+            <a:srgbClr val="E9D1FA"/>
           </a:solidFill>
           <a:ln w="19050">
-            <a:solidFill>
-              <a:srgbClr val="9651C8"/>
-            </a:solidFill>
+            <a:noFill/>
             <a:prstDash val="dash"/>
           </a:ln>
         </p:spPr>
@@ -5034,7 +5270,7 @@
             <a:r>
               <a:rPr sz="1200" b="0" i="0">
                 <a:solidFill>
-                  <a:srgbClr val="4E226D"/>
+                  <a:srgbClr val="8E8780"/>
                 </a:solidFill>
               </a:rPr>
               <a:t>사진 3</a:t>
@@ -5044,14 +5280,14 @@
       </p:sp>
       <p:sp>
         <p:nvSpPr>
-          <p:cNvPr id="8" name="사진 자리"/>
+          <p:cNvPr id="9" name="사진 자리"/>
           <p:cNvSpPr/>
           <p:nvPr/>
         </p:nvSpPr>
         <p:spPr>
           <a:xfrm>
-            <a:off x="640080" y="4091939"/>
-            <a:ext cx="3515258" cy="2308860"/>
+            <a:off x="640080" y="4160520"/>
+            <a:ext cx="3515258" cy="2194560"/>
           </a:xfrm>
           <a:prstGeom prst="roundRect">
             <a:avLst>
@@ -5059,12 +5295,10 @@
             </a:avLst>
           </a:prstGeom>
           <a:solidFill>
-            <a:srgbClr val="E8D4F7"/>
+            <a:srgbClr val="E9D1FA"/>
           </a:solidFill>
           <a:ln w="19050">
-            <a:solidFill>
-              <a:srgbClr val="9651C8"/>
-            </a:solidFill>
+            <a:noFill/>
             <a:prstDash val="dash"/>
           </a:ln>
         </p:spPr>
@@ -5082,7 +5316,7 @@
             <a:r>
               <a:rPr sz="1200" b="0" i="0">
                 <a:solidFill>
-                  <a:srgbClr val="4E226D"/>
+                  <a:srgbClr val="8E8780"/>
                 </a:solidFill>
               </a:rPr>
               <a:t>사진 4</a:t>
@@ -5092,14 +5326,14 @@
       </p:sp>
       <p:sp>
         <p:nvSpPr>
-          <p:cNvPr id="9" name="사진 자리"/>
+          <p:cNvPr id="10" name="사진 자리"/>
           <p:cNvSpPr/>
           <p:nvPr/>
         </p:nvSpPr>
         <p:spPr>
           <a:xfrm>
-            <a:off x="4338218" y="4091939"/>
-            <a:ext cx="3515258" cy="2308860"/>
+            <a:off x="4338218" y="4160520"/>
+            <a:ext cx="3515258" cy="2194560"/>
           </a:xfrm>
           <a:prstGeom prst="roundRect">
             <a:avLst>
@@ -5107,12 +5341,10 @@
             </a:avLst>
           </a:prstGeom>
           <a:solidFill>
-            <a:srgbClr val="E8D4F7"/>
+            <a:srgbClr val="E9D1FA"/>
           </a:solidFill>
           <a:ln w="19050">
-            <a:solidFill>
-              <a:srgbClr val="9651C8"/>
-            </a:solidFill>
+            <a:noFill/>
             <a:prstDash val="dash"/>
           </a:ln>
         </p:spPr>
@@ -5130,7 +5362,7 @@
             <a:r>
               <a:rPr sz="1200" b="0" i="0">
                 <a:solidFill>
-                  <a:srgbClr val="4E226D"/>
+                  <a:srgbClr val="8E8780"/>
                 </a:solidFill>
               </a:rPr>
               <a:t>사진 5</a:t>
@@ -5140,14 +5372,14 @@
       </p:sp>
       <p:sp>
         <p:nvSpPr>
-          <p:cNvPr id="10" name="사진 자리"/>
+          <p:cNvPr id="11" name="사진 자리"/>
           <p:cNvSpPr/>
           <p:nvPr/>
         </p:nvSpPr>
         <p:spPr>
           <a:xfrm>
-            <a:off x="8036356" y="4091939"/>
-            <a:ext cx="3515258" cy="2308860"/>
+            <a:off x="8036356" y="4160520"/>
+            <a:ext cx="3515258" cy="2194560"/>
           </a:xfrm>
           <a:prstGeom prst="roundRect">
             <a:avLst>
@@ -5155,12 +5387,10 @@
             </a:avLst>
           </a:prstGeom>
           <a:solidFill>
-            <a:srgbClr val="E8D4F7"/>
+            <a:srgbClr val="E9D1FA"/>
           </a:solidFill>
           <a:ln w="19050">
-            <a:solidFill>
-              <a:srgbClr val="9651C8"/>
-            </a:solidFill>
+            <a:noFill/>
             <a:prstDash val="dash"/>
           </a:ln>
         </p:spPr>
@@ -5178,7 +5408,7 @@
             <a:r>
               <a:rPr sz="1200" b="0" i="0">
                 <a:solidFill>
-                  <a:srgbClr val="4E226D"/>
+                  <a:srgbClr val="8E8780"/>
                 </a:solidFill>
               </a:rPr>
               <a:t>사진 6</a:t>
@@ -5197,6 +5427,14 @@
 <file path=ppt/slides/slide6.xml><?xml version="1.0" encoding="utf-8"?>
 <p:sld xmlns:a="http://schemas.openxmlformats.org/drawingml/2006/main" xmlns:p="http://schemas.openxmlformats.org/presentationml/2006/main" xmlns:r="http://schemas.openxmlformats.org/officeDocument/2006/relationships">
   <p:cSld>
+    <p:bg>
+      <p:bgPr>
+        <a:solidFill>
+          <a:srgbClr val="F5EAFD"/>
+        </a:solidFill>
+        <a:effectLst/>
+      </p:bgPr>
+    </p:bg>
     <p:spTree>
       <p:nvGrpSpPr>
         <p:cNvPr id="1" name=""/>
@@ -5204,30 +5442,116 @@
         <p:nvPr/>
       </p:nvGrpSpPr>
       <p:grpSpPr/>
-      <p:pic>
-        <p:nvPicPr>
-          <p:cNvPr id="3" name="표지 그림" descr="wedding-11.jpg"/>
-          <p:cNvPicPr>
-            <a:picLocks noChangeAspect="1"/>
-          </p:cNvPicPr>
+      <p:sp>
+        <p:nvSpPr>
+          <p:cNvPr id="3" name="사진 자리"/>
+          <p:cNvSpPr/>
           <p:nvPr/>
-        </p:nvPicPr>
-        <p:blipFill>
-          <a:blip r:embed="rId2"/>
-          <a:stretch>
-            <a:fillRect/>
-          </a:stretch>
-        </p:blipFill>
+        </p:nvSpPr>
         <p:spPr>
           <a:xfrm>
             <a:off x="0" y="0"/>
-            <a:ext cx="12191695" cy="6858000"/>
+            <a:ext cx="4389010" cy="6858000"/>
           </a:xfrm>
           <a:prstGeom prst="rect">
             <a:avLst/>
           </a:prstGeom>
-        </p:spPr>
-      </p:pic>
+          <a:solidFill>
+            <a:srgbClr val="D2A6F2"/>
+          </a:solidFill>
+          <a:ln>
+            <a:noFill/>
+          </a:ln>
+        </p:spPr>
+        <p:txBody>
+          <a:bodyPr rtlCol="0" anchor="ctr" wrap="square" lIns="54864" rIns="54864" tIns="27432" bIns="27432">
+            <a:noAutofit/>
+          </a:bodyPr>
+          <a:lstStyle/>
+          <a:p>
+            <a:pPr algn="ctr">
+              <a:lnSpc>
+                <a:spcPct val="100000"/>
+              </a:lnSpc>
+            </a:pPr>
+            <a:r>
+              <a:rPr sz="1400" b="0" i="0">
+                <a:solidFill>
+                  <a:srgbClr val="3B2749"/>
+                </a:solidFill>
+              </a:rPr>
+              <a:t>사진을 넣어 주세요</a:t>
+            </a:r>
+          </a:p>
+        </p:txBody>
+      </p:sp>
+      <p:sp>
+        <p:nvSpPr>
+          <p:cNvPr id="4" name="장식"/>
+          <p:cNvSpPr/>
+          <p:nvPr/>
+        </p:nvSpPr>
+        <p:spPr>
+          <a:xfrm>
+            <a:off x="365750" y="365760"/>
+            <a:ext cx="3657508" cy="6126480"/>
+          </a:xfrm>
+          <a:prstGeom prst="rect">
+            <a:avLst/>
+          </a:prstGeom>
+          <a:noFill/>
+          <a:ln w="9525">
+            <a:solidFill>
+              <a:srgbClr val="26231F"/>
+            </a:solidFill>
+          </a:ln>
+        </p:spPr>
+        <p:txBody>
+          <a:bodyPr rtlCol="0" anchor="ctr"/>
+          <a:lstStyle/>
+          <a:p>
+            <a:pPr algn="ctr"/>
+          </a:p>
+        </p:txBody>
+      </p:sp>
+      <p:sp>
+        <p:nvSpPr>
+          <p:cNvPr id="5" name="라벨"/>
+          <p:cNvSpPr txBox="1"/>
+          <p:nvPr/>
+        </p:nvSpPr>
+        <p:spPr>
+          <a:xfrm>
+            <a:off x="6827349" y="2148840"/>
+            <a:ext cx="4632844" cy="274320"/>
+          </a:xfrm>
+          <a:prstGeom prst="rect">
+            <a:avLst/>
+          </a:prstGeom>
+          <a:noFill/>
+        </p:spPr>
+        <p:txBody>
+          <a:bodyPr wrap="square" lIns="54864" rIns="54864" tIns="27432" bIns="27432" anchor="t">
+            <a:noAutofit/>
+          </a:bodyPr>
+          <a:lstStyle/>
+          <a:p>
+            <a:pPr algn="l">
+              <a:lnSpc>
+                <a:spcPct val="115000"/>
+              </a:lnSpc>
+            </a:pPr>
+            <a:r>
+              <a:rPr sz="1000" b="1" i="0" spc="250">
+                <a:solidFill>
+                  <a:srgbClr val="26231F"/>
+                </a:solidFill>
+              </a:rPr>
+              <a:t>WEDDING</a:t>
+            </a:r>
+          </a:p>
+        </p:txBody>
+      </p:sp>
       <p:sp>
         <p:nvSpPr>
           <p:cNvPr id="2" name="Title 1"/>
@@ -5240,8 +5564,8 @@
         </p:nvSpPr>
         <p:spPr>
           <a:xfrm>
-            <a:off x="853418" y="2057400"/>
-            <a:ext cx="6095847" cy="1554480"/>
+            <a:off x="6827349" y="2606040"/>
+            <a:ext cx="4632844" cy="1188720"/>
           </a:xfrm>
         </p:spPr>
         <p:txBody>
@@ -5258,7 +5582,7 @@
             <a:r>
               <a:rPr sz="3400" b="1" i="0">
                 <a:solidFill>
-                  <a:srgbClr val="4E226D"/>
+                  <a:srgbClr val="26231F"/>
                 </a:solidFill>
               </a:rPr>
               <a:t>와 주셔서 고맙습니다</a:t>
@@ -5268,14 +5592,14 @@
       </p:sp>
       <p:sp>
         <p:nvSpPr>
-          <p:cNvPr id="4" name="한 줄 문구"/>
+          <p:cNvPr id="6" name="한 줄 문구"/>
           <p:cNvSpPr txBox="1"/>
           <p:nvPr/>
         </p:nvSpPr>
         <p:spPr>
           <a:xfrm>
-            <a:off x="853418" y="3749039"/>
-            <a:ext cx="6095847" cy="822960"/>
+            <a:off x="6827349" y="3886200"/>
+            <a:ext cx="4632844" cy="822960"/>
           </a:xfrm>
           <a:prstGeom prst="rect">
             <a:avLst/>
@@ -5294,9 +5618,9 @@
               </a:lnSpc>
             </a:pPr>
             <a:r>
-              <a:rPr sz="1700" b="0" i="1">
-                <a:solidFill>
-                  <a:srgbClr val="4E226D"/>
+              <a:rPr sz="1700" b="0" i="0">
+                <a:solidFill>
+                  <a:srgbClr val="26231F"/>
                 </a:solidFill>
               </a:rPr>
               <a:t>잘 살겠습니다</a:t>
@@ -5306,14 +5630,14 @@
       </p:sp>
       <p:sp>
         <p:nvSpPr>
-          <p:cNvPr id="5" name="안내 문구"/>
+          <p:cNvPr id="7" name="안내 문구"/>
           <p:cNvSpPr txBox="1"/>
           <p:nvPr/>
         </p:nvSpPr>
         <p:spPr>
           <a:xfrm>
-            <a:off x="853418" y="4617720"/>
-            <a:ext cx="6095847" cy="914400"/>
+            <a:off x="6827349" y="4754880"/>
+            <a:ext cx="4632844" cy="914400"/>
           </a:xfrm>
           <a:prstGeom prst="rect">
             <a:avLst/>
@@ -5334,7 +5658,7 @@
             <a:r>
               <a:rPr sz="1400" b="0" i="0">
                 <a:solidFill>
-                  <a:srgbClr val="666666"/>
+                  <a:srgbClr val="26231F"/>
                 </a:solidFill>
               </a:rPr>
               <a:t>신랑 이름 ♥ 신부 이름</a:t>
@@ -5361,34 +5685,34 @@
         <a:sysClr val="window" lastClr="FFFFFF"/>
       </a:lt1>
       <a:dk2>
-        <a:srgbClr val="4E226D"/>
+        <a:srgbClr val="3B2749"/>
       </a:dk2>
       <a:lt2>
-        <a:srgbClr val="F8F3FC"/>
+        <a:srgbClr val="F5EAFD"/>
       </a:lt2>
       <a:accent1>
-        <a:srgbClr val="9651C8"/>
+        <a:srgbClr val="C997ED"/>
       </a:accent1>
       <a:accent2>
-        <a:srgbClr val="339941"/>
+        <a:srgbClr val="F3BAF0"/>
       </a:accent2>
       <a:accent3>
-        <a:srgbClr val="4E226D"/>
+        <a:srgbClr val="3B2749"/>
       </a:accent3>
       <a:accent4>
-        <a:srgbClr val="E8D4F7"/>
+        <a:srgbClr val="E9D1FA"/>
       </a:accent4>
       <a:accent5>
-        <a:srgbClr val="647584"/>
+        <a:srgbClr val="DEA8EE"/>
       </a:accent5>
       <a:accent6>
-        <a:srgbClr val="957AA7"/>
+        <a:srgbClr val="897D92"/>
       </a:accent6>
       <a:hlink>
-        <a:srgbClr val="9651C8"/>
+        <a:srgbClr val="C997ED"/>
       </a:hlink>
       <a:folHlink>
-        <a:srgbClr val="4E226D"/>
+        <a:srgbClr val="3B2749"/>
       </a:folHlink>
     </a:clrScheme>
     <a:fontScheme name="Office">
